--- a/Day-3/OOP_Module7_8.pptx
+++ b/Day-3/OOP_Module7_8.pptx
@@ -6113,13 +6113,13 @@
       <dgm:prSet presAssocID="{6603234B-4DB9-48FF-B5DB-4350C48F9EBA}" presName="iconRect" presStyleLbl="node1" presStyleIdx="0" presStyleCnt="6"/>
       <dgm:spPr>
         <a:blipFill>
-          <a:blip xmlns:r="http://schemas.openxmlformats.org/officeDocument/2006/relationships" r:embed="rId1">
+          <a:blip xmlns:r="http://schemas.openxmlformats.org/officeDocument/2006/relationships">
             <a:extLst>
               <a:ext uri="{28A0092B-C50C-407E-A947-70E740481C1C}">
                 <a14:useLocalDpi xmlns:a14="http://schemas.microsoft.com/office/drawing/2010/main" val="0"/>
               </a:ext>
               <a:ext uri="{96DAC541-7B7A-43D3-8B79-37D633B846F1}">
-                <asvg:svgBlip xmlns:asvg="http://schemas.microsoft.com/office/drawing/2016/SVG/main" r:embed="rId2"/>
+                <asvg:svgBlip xmlns:asvg="http://schemas.microsoft.com/office/drawing/2016/SVG/main" r:embed="rId1"/>
               </a:ext>
             </a:extLst>
           </a:blip>
@@ -6166,13 +6166,13 @@
       <dgm:prSet presAssocID="{966C61E0-D774-4183-A322-963A65BA3D43}" presName="iconRect" presStyleLbl="node1" presStyleIdx="1" presStyleCnt="6"/>
       <dgm:spPr>
         <a:blipFill>
-          <a:blip xmlns:r="http://schemas.openxmlformats.org/officeDocument/2006/relationships" r:embed="rId3">
+          <a:blip xmlns:r="http://schemas.openxmlformats.org/officeDocument/2006/relationships">
             <a:extLst>
               <a:ext uri="{28A0092B-C50C-407E-A947-70E740481C1C}">
                 <a14:useLocalDpi xmlns:a14="http://schemas.microsoft.com/office/drawing/2010/main" val="0"/>
               </a:ext>
               <a:ext uri="{96DAC541-7B7A-43D3-8B79-37D633B846F1}">
-                <asvg:svgBlip xmlns:asvg="http://schemas.microsoft.com/office/drawing/2016/SVG/main" r:embed="rId4"/>
+                <asvg:svgBlip xmlns:asvg="http://schemas.microsoft.com/office/drawing/2016/SVG/main" r:embed="rId2"/>
               </a:ext>
             </a:extLst>
           </a:blip>
@@ -6219,13 +6219,13 @@
       <dgm:prSet presAssocID="{F103F130-F4EB-408E-A0DE-8EFF96A6972C}" presName="iconRect" presStyleLbl="node1" presStyleIdx="2" presStyleCnt="6"/>
       <dgm:spPr>
         <a:blipFill>
-          <a:blip xmlns:r="http://schemas.openxmlformats.org/officeDocument/2006/relationships" r:embed="rId5">
+          <a:blip xmlns:r="http://schemas.openxmlformats.org/officeDocument/2006/relationships">
             <a:extLst>
               <a:ext uri="{28A0092B-C50C-407E-A947-70E740481C1C}">
                 <a14:useLocalDpi xmlns:a14="http://schemas.microsoft.com/office/drawing/2010/main" val="0"/>
               </a:ext>
               <a:ext uri="{96DAC541-7B7A-43D3-8B79-37D633B846F1}">
-                <asvg:svgBlip xmlns:asvg="http://schemas.microsoft.com/office/drawing/2016/SVG/main" r:embed="rId6"/>
+                <asvg:svgBlip xmlns:asvg="http://schemas.microsoft.com/office/drawing/2016/SVG/main" r:embed="rId3"/>
               </a:ext>
             </a:extLst>
           </a:blip>
@@ -6272,13 +6272,13 @@
       <dgm:prSet presAssocID="{D251B1DB-B515-4E78-9300-126BED4143D6}" presName="iconRect" presStyleLbl="node1" presStyleIdx="3" presStyleCnt="6"/>
       <dgm:spPr>
         <a:blipFill>
-          <a:blip xmlns:r="http://schemas.openxmlformats.org/officeDocument/2006/relationships" r:embed="rId7">
+          <a:blip xmlns:r="http://schemas.openxmlformats.org/officeDocument/2006/relationships">
             <a:extLst>
               <a:ext uri="{28A0092B-C50C-407E-A947-70E740481C1C}">
                 <a14:useLocalDpi xmlns:a14="http://schemas.microsoft.com/office/drawing/2010/main" val="0"/>
               </a:ext>
               <a:ext uri="{96DAC541-7B7A-43D3-8B79-37D633B846F1}">
-                <asvg:svgBlip xmlns:asvg="http://schemas.microsoft.com/office/drawing/2016/SVG/main" r:embed="rId8"/>
+                <asvg:svgBlip xmlns:asvg="http://schemas.microsoft.com/office/drawing/2016/SVG/main" r:embed="rId4"/>
               </a:ext>
             </a:extLst>
           </a:blip>
@@ -6325,13 +6325,13 @@
       <dgm:prSet presAssocID="{49ADE3C1-EC92-47B7-AA51-E7C88EAAFACA}" presName="iconRect" presStyleLbl="node1" presStyleIdx="4" presStyleCnt="6"/>
       <dgm:spPr>
         <a:blipFill>
-          <a:blip xmlns:r="http://schemas.openxmlformats.org/officeDocument/2006/relationships" r:embed="rId9">
+          <a:blip xmlns:r="http://schemas.openxmlformats.org/officeDocument/2006/relationships">
             <a:extLst>
               <a:ext uri="{28A0092B-C50C-407E-A947-70E740481C1C}">
                 <a14:useLocalDpi xmlns:a14="http://schemas.microsoft.com/office/drawing/2010/main" val="0"/>
               </a:ext>
               <a:ext uri="{96DAC541-7B7A-43D3-8B79-37D633B846F1}">
-                <asvg:svgBlip xmlns:asvg="http://schemas.microsoft.com/office/drawing/2016/SVG/main" r:embed="rId10"/>
+                <asvg:svgBlip xmlns:asvg="http://schemas.microsoft.com/office/drawing/2016/SVG/main" r:embed="rId5"/>
               </a:ext>
             </a:extLst>
           </a:blip>
@@ -6378,13 +6378,13 @@
       <dgm:prSet presAssocID="{7B01C3A2-51A3-4E5E-88A4-2EA916AA1471}" presName="iconRect" presStyleLbl="node1" presStyleIdx="5" presStyleCnt="6"/>
       <dgm:spPr>
         <a:blipFill>
-          <a:blip xmlns:r="http://schemas.openxmlformats.org/officeDocument/2006/relationships" r:embed="rId11">
+          <a:blip xmlns:r="http://schemas.openxmlformats.org/officeDocument/2006/relationships">
             <a:extLst>
               <a:ext uri="{28A0092B-C50C-407E-A947-70E740481C1C}">
                 <a14:useLocalDpi xmlns:a14="http://schemas.microsoft.com/office/drawing/2010/main" val="0"/>
               </a:ext>
               <a:ext uri="{96DAC541-7B7A-43D3-8B79-37D633B846F1}">
-                <asvg:svgBlip xmlns:asvg="http://schemas.microsoft.com/office/drawing/2016/SVG/main" r:embed="rId12"/>
+                <asvg:svgBlip xmlns:asvg="http://schemas.microsoft.com/office/drawing/2016/SVG/main" r:embed="rId6"/>
               </a:ext>
             </a:extLst>
           </a:blip>
@@ -6619,13 +6619,13 @@
       <dgm:prSet presAssocID="{88AF710B-8BB4-4C61-919B-0580A1CA838D}" presName="iconRect" presStyleLbl="node1" presStyleIdx="0" presStyleCnt="3"/>
       <dgm:spPr>
         <a:blipFill>
-          <a:blip xmlns:r="http://schemas.openxmlformats.org/officeDocument/2006/relationships" r:embed="rId1">
+          <a:blip xmlns:r="http://schemas.openxmlformats.org/officeDocument/2006/relationships">
             <a:extLst>
               <a:ext uri="{28A0092B-C50C-407E-A947-70E740481C1C}">
                 <a14:useLocalDpi xmlns:a14="http://schemas.microsoft.com/office/drawing/2010/main" val="0"/>
               </a:ext>
               <a:ext uri="{96DAC541-7B7A-43D3-8B79-37D633B846F1}">
-                <asvg:svgBlip xmlns:asvg="http://schemas.microsoft.com/office/drawing/2016/SVG/main" r:embed="rId2"/>
+                <asvg:svgBlip xmlns:asvg="http://schemas.microsoft.com/office/drawing/2016/SVG/main" r:embed="rId1"/>
               </a:ext>
             </a:extLst>
           </a:blip>
@@ -6672,13 +6672,13 @@
       <dgm:prSet presAssocID="{21ED91E3-2BC8-4326-B412-CE4D1F3B3835}" presName="iconRect" presStyleLbl="node1" presStyleIdx="1" presStyleCnt="3"/>
       <dgm:spPr>
         <a:blipFill>
-          <a:blip xmlns:r="http://schemas.openxmlformats.org/officeDocument/2006/relationships" r:embed="rId3">
+          <a:blip xmlns:r="http://schemas.openxmlformats.org/officeDocument/2006/relationships">
             <a:extLst>
               <a:ext uri="{28A0092B-C50C-407E-A947-70E740481C1C}">
                 <a14:useLocalDpi xmlns:a14="http://schemas.microsoft.com/office/drawing/2010/main" val="0"/>
               </a:ext>
               <a:ext uri="{96DAC541-7B7A-43D3-8B79-37D633B846F1}">
-                <asvg:svgBlip xmlns:asvg="http://schemas.microsoft.com/office/drawing/2016/SVG/main" r:embed="rId4"/>
+                <asvg:svgBlip xmlns:asvg="http://schemas.microsoft.com/office/drawing/2016/SVG/main" r:embed="rId2"/>
               </a:ext>
             </a:extLst>
           </a:blip>
@@ -6725,13 +6725,13 @@
       <dgm:prSet presAssocID="{92EBE9E9-EB4B-46CE-88A5-FD96598CFECF}" presName="iconRect" presStyleLbl="node1" presStyleIdx="2" presStyleCnt="3"/>
       <dgm:spPr>
         <a:blipFill>
-          <a:blip xmlns:r="http://schemas.openxmlformats.org/officeDocument/2006/relationships" r:embed="rId5">
+          <a:blip xmlns:r="http://schemas.openxmlformats.org/officeDocument/2006/relationships">
             <a:extLst>
               <a:ext uri="{28A0092B-C50C-407E-A947-70E740481C1C}">
                 <a14:useLocalDpi xmlns:a14="http://schemas.microsoft.com/office/drawing/2010/main" val="0"/>
               </a:ext>
               <a:ext uri="{96DAC541-7B7A-43D3-8B79-37D633B846F1}">
-                <asvg:svgBlip xmlns:asvg="http://schemas.microsoft.com/office/drawing/2016/SVG/main" r:embed="rId6"/>
+                <asvg:svgBlip xmlns:asvg="http://schemas.microsoft.com/office/drawing/2016/SVG/main" r:embed="rId3"/>
               </a:ext>
             </a:extLst>
           </a:blip>
@@ -7186,13 +7186,13 @@
       <dgm:prSet presAssocID="{05CB0226-D4DF-420B-ABD6-59CF4E303072}" presName="iconRect" presStyleLbl="node1" presStyleIdx="0" presStyleCnt="3"/>
       <dgm:spPr>
         <a:blipFill>
-          <a:blip xmlns:r="http://schemas.openxmlformats.org/officeDocument/2006/relationships" r:embed="rId1">
+          <a:blip xmlns:r="http://schemas.openxmlformats.org/officeDocument/2006/relationships">
             <a:extLst>
               <a:ext uri="{28A0092B-C50C-407E-A947-70E740481C1C}">
                 <a14:useLocalDpi xmlns:a14="http://schemas.microsoft.com/office/drawing/2010/main" val="0"/>
               </a:ext>
               <a:ext uri="{96DAC541-7B7A-43D3-8B79-37D633B846F1}">
-                <asvg:svgBlip xmlns:asvg="http://schemas.microsoft.com/office/drawing/2016/SVG/main" r:embed="rId2"/>
+                <asvg:svgBlip xmlns:asvg="http://schemas.microsoft.com/office/drawing/2016/SVG/main" r:embed="rId1"/>
               </a:ext>
             </a:extLst>
           </a:blip>
@@ -7239,13 +7239,13 @@
       <dgm:prSet presAssocID="{8B9022DE-1311-4797-9A22-0516BF96D731}" presName="iconRect" presStyleLbl="node1" presStyleIdx="1" presStyleCnt="3"/>
       <dgm:spPr>
         <a:blipFill>
-          <a:blip xmlns:r="http://schemas.openxmlformats.org/officeDocument/2006/relationships" r:embed="rId3">
+          <a:blip xmlns:r="http://schemas.openxmlformats.org/officeDocument/2006/relationships">
             <a:extLst>
               <a:ext uri="{28A0092B-C50C-407E-A947-70E740481C1C}">
                 <a14:useLocalDpi xmlns:a14="http://schemas.microsoft.com/office/drawing/2010/main" val="0"/>
               </a:ext>
               <a:ext uri="{96DAC541-7B7A-43D3-8B79-37D633B846F1}">
-                <asvg:svgBlip xmlns:asvg="http://schemas.microsoft.com/office/drawing/2016/SVG/main" r:embed="rId4"/>
+                <asvg:svgBlip xmlns:asvg="http://schemas.microsoft.com/office/drawing/2016/SVG/main" r:embed="rId2"/>
               </a:ext>
             </a:extLst>
           </a:blip>
@@ -7292,13 +7292,13 @@
       <dgm:prSet presAssocID="{3FF42EF2-9CB3-4356-9A14-6EF3D3BB2C3D}" presName="iconRect" presStyleLbl="node1" presStyleIdx="2" presStyleCnt="3"/>
       <dgm:spPr>
         <a:blipFill>
-          <a:blip xmlns:r="http://schemas.openxmlformats.org/officeDocument/2006/relationships" r:embed="rId5">
+          <a:blip xmlns:r="http://schemas.openxmlformats.org/officeDocument/2006/relationships">
             <a:extLst>
               <a:ext uri="{28A0092B-C50C-407E-A947-70E740481C1C}">
                 <a14:useLocalDpi xmlns:a14="http://schemas.microsoft.com/office/drawing/2010/main" val="0"/>
               </a:ext>
               <a:ext uri="{96DAC541-7B7A-43D3-8B79-37D633B846F1}">
-                <asvg:svgBlip xmlns:asvg="http://schemas.microsoft.com/office/drawing/2016/SVG/main" r:embed="rId6"/>
+                <asvg:svgBlip xmlns:asvg="http://schemas.microsoft.com/office/drawing/2016/SVG/main" r:embed="rId3"/>
               </a:ext>
             </a:extLst>
           </a:blip>
@@ -7541,13 +7541,13 @@
       <dgm:prSet presAssocID="{90E5EDCC-1DEF-46F8-9EBD-8AAC2012CA41}" presName="iconRect" presStyleLbl="node1" presStyleIdx="0" presStyleCnt="4"/>
       <dgm:spPr>
         <a:blipFill>
-          <a:blip xmlns:r="http://schemas.openxmlformats.org/officeDocument/2006/relationships" r:embed="rId1">
+          <a:blip xmlns:r="http://schemas.openxmlformats.org/officeDocument/2006/relationships">
             <a:extLst>
               <a:ext uri="{28A0092B-C50C-407E-A947-70E740481C1C}">
                 <a14:useLocalDpi xmlns:a14="http://schemas.microsoft.com/office/drawing/2010/main" val="0"/>
               </a:ext>
               <a:ext uri="{96DAC541-7B7A-43D3-8B79-37D633B846F1}">
-                <asvg:svgBlip xmlns:asvg="http://schemas.microsoft.com/office/drawing/2016/SVG/main" r:embed="rId2"/>
+                <asvg:svgBlip xmlns:asvg="http://schemas.microsoft.com/office/drawing/2016/SVG/main" r:embed="rId1"/>
               </a:ext>
             </a:extLst>
           </a:blip>
@@ -7590,13 +7590,13 @@
       <dgm:prSet presAssocID="{BCEA9B41-D930-4266-B361-27478F8CF892}" presName="iconRect" presStyleLbl="node1" presStyleIdx="1" presStyleCnt="4"/>
       <dgm:spPr>
         <a:blipFill>
-          <a:blip xmlns:r="http://schemas.openxmlformats.org/officeDocument/2006/relationships" r:embed="rId3">
+          <a:blip xmlns:r="http://schemas.openxmlformats.org/officeDocument/2006/relationships">
             <a:extLst>
               <a:ext uri="{28A0092B-C50C-407E-A947-70E740481C1C}">
                 <a14:useLocalDpi xmlns:a14="http://schemas.microsoft.com/office/drawing/2010/main" val="0"/>
               </a:ext>
               <a:ext uri="{96DAC541-7B7A-43D3-8B79-37D633B846F1}">
-                <asvg:svgBlip xmlns:asvg="http://schemas.microsoft.com/office/drawing/2016/SVG/main" r:embed="rId4"/>
+                <asvg:svgBlip xmlns:asvg="http://schemas.microsoft.com/office/drawing/2016/SVG/main" r:embed="rId2"/>
               </a:ext>
             </a:extLst>
           </a:blip>
@@ -7639,13 +7639,13 @@
       <dgm:prSet presAssocID="{2700885B-8EF6-450D-874F-14BC603B0371}" presName="iconRect" presStyleLbl="node1" presStyleIdx="2" presStyleCnt="4"/>
       <dgm:spPr>
         <a:blipFill>
-          <a:blip xmlns:r="http://schemas.openxmlformats.org/officeDocument/2006/relationships" r:embed="rId5">
+          <a:blip xmlns:r="http://schemas.openxmlformats.org/officeDocument/2006/relationships">
             <a:extLst>
               <a:ext uri="{28A0092B-C50C-407E-A947-70E740481C1C}">
                 <a14:useLocalDpi xmlns:a14="http://schemas.microsoft.com/office/drawing/2010/main" val="0"/>
               </a:ext>
               <a:ext uri="{96DAC541-7B7A-43D3-8B79-37D633B846F1}">
-                <asvg:svgBlip xmlns:asvg="http://schemas.microsoft.com/office/drawing/2016/SVG/main" r:embed="rId6"/>
+                <asvg:svgBlip xmlns:asvg="http://schemas.microsoft.com/office/drawing/2016/SVG/main" r:embed="rId3"/>
               </a:ext>
             </a:extLst>
           </a:blip>
@@ -7688,13 +7688,13 @@
       <dgm:prSet presAssocID="{4878BAE8-9733-4714-9576-06635260E65D}" presName="iconRect" presStyleLbl="node1" presStyleIdx="3" presStyleCnt="4"/>
       <dgm:spPr>
         <a:blipFill>
-          <a:blip xmlns:r="http://schemas.openxmlformats.org/officeDocument/2006/relationships" r:embed="rId7">
+          <a:blip xmlns:r="http://schemas.openxmlformats.org/officeDocument/2006/relationships">
             <a:extLst>
               <a:ext uri="{28A0092B-C50C-407E-A947-70E740481C1C}">
                 <a14:useLocalDpi xmlns:a14="http://schemas.microsoft.com/office/drawing/2010/main" val="0"/>
               </a:ext>
               <a:ext uri="{96DAC541-7B7A-43D3-8B79-37D633B846F1}">
-                <asvg:svgBlip xmlns:asvg="http://schemas.microsoft.com/office/drawing/2016/SVG/main" r:embed="rId8"/>
+                <asvg:svgBlip xmlns:asvg="http://schemas.microsoft.com/office/drawing/2016/SVG/main" r:embed="rId4"/>
               </a:ext>
             </a:extLst>
           </a:blip>
@@ -7918,13 +7918,13 @@
       <dgm:prSet presAssocID="{9256976E-182B-4A8D-A2BC-092BB1E063A8}" presName="iconRect" presStyleLbl="node1" presStyleIdx="0" presStyleCnt="3"/>
       <dgm:spPr>
         <a:blipFill>
-          <a:blip xmlns:r="http://schemas.openxmlformats.org/officeDocument/2006/relationships" r:embed="rId1">
+          <a:blip xmlns:r="http://schemas.openxmlformats.org/officeDocument/2006/relationships">
             <a:extLst>
               <a:ext uri="{28A0092B-C50C-407E-A947-70E740481C1C}">
                 <a14:useLocalDpi xmlns:a14="http://schemas.microsoft.com/office/drawing/2010/main" val="0"/>
               </a:ext>
               <a:ext uri="{96DAC541-7B7A-43D3-8B79-37D633B846F1}">
-                <asvg:svgBlip xmlns:asvg="http://schemas.microsoft.com/office/drawing/2016/SVG/main" r:embed="rId2"/>
+                <asvg:svgBlip xmlns:asvg="http://schemas.microsoft.com/office/drawing/2016/SVG/main" r:embed="rId1"/>
               </a:ext>
             </a:extLst>
           </a:blip>
@@ -7971,13 +7971,13 @@
       <dgm:prSet presAssocID="{A2BB6184-5C42-424F-826D-6FBD89A5E080}" presName="iconRect" presStyleLbl="node1" presStyleIdx="1" presStyleCnt="3"/>
       <dgm:spPr>
         <a:blipFill>
-          <a:blip xmlns:r="http://schemas.openxmlformats.org/officeDocument/2006/relationships" r:embed="rId3">
+          <a:blip xmlns:r="http://schemas.openxmlformats.org/officeDocument/2006/relationships">
             <a:extLst>
               <a:ext uri="{28A0092B-C50C-407E-A947-70E740481C1C}">
                 <a14:useLocalDpi xmlns:a14="http://schemas.microsoft.com/office/drawing/2010/main" val="0"/>
               </a:ext>
               <a:ext uri="{96DAC541-7B7A-43D3-8B79-37D633B846F1}">
-                <asvg:svgBlip xmlns:asvg="http://schemas.microsoft.com/office/drawing/2016/SVG/main" r:embed="rId4"/>
+                <asvg:svgBlip xmlns:asvg="http://schemas.microsoft.com/office/drawing/2016/SVG/main" r:embed="rId2"/>
               </a:ext>
             </a:extLst>
           </a:blip>
@@ -8024,13 +8024,13 @@
       <dgm:prSet presAssocID="{466875C8-DA00-4081-9453-77833850A32F}" presName="iconRect" presStyleLbl="node1" presStyleIdx="2" presStyleCnt="3"/>
       <dgm:spPr>
         <a:blipFill>
-          <a:blip xmlns:r="http://schemas.openxmlformats.org/officeDocument/2006/relationships" r:embed="rId5">
+          <a:blip xmlns:r="http://schemas.openxmlformats.org/officeDocument/2006/relationships">
             <a:extLst>
               <a:ext uri="{28A0092B-C50C-407E-A947-70E740481C1C}">
                 <a14:useLocalDpi xmlns:a14="http://schemas.microsoft.com/office/drawing/2010/main" val="0"/>
               </a:ext>
               <a:ext uri="{96DAC541-7B7A-43D3-8B79-37D633B846F1}">
-                <asvg:svgBlip xmlns:asvg="http://schemas.microsoft.com/office/drawing/2016/SVG/main" r:embed="rId6"/>
+                <asvg:svgBlip xmlns:asvg="http://schemas.microsoft.com/office/drawing/2016/SVG/main" r:embed="rId3"/>
               </a:ext>
             </a:extLst>
           </a:blip>
@@ -8241,13 +8241,13 @@
       <dgm:prSet presAssocID="{FD741FA7-39E5-4567-8808-8E5D6F92C00F}" presName="iconRect" presStyleLbl="node1" presStyleIdx="0" presStyleCnt="3"/>
       <dgm:spPr>
         <a:blipFill>
-          <a:blip xmlns:r="http://schemas.openxmlformats.org/officeDocument/2006/relationships" r:embed="rId1">
+          <a:blip xmlns:r="http://schemas.openxmlformats.org/officeDocument/2006/relationships">
             <a:extLst>
               <a:ext uri="{28A0092B-C50C-407E-A947-70E740481C1C}">
                 <a14:useLocalDpi xmlns:a14="http://schemas.microsoft.com/office/drawing/2010/main" val="0"/>
               </a:ext>
               <a:ext uri="{96DAC541-7B7A-43D3-8B79-37D633B846F1}">
-                <asvg:svgBlip xmlns:asvg="http://schemas.microsoft.com/office/drawing/2016/SVG/main" r:embed="rId2"/>
+                <asvg:svgBlip xmlns:asvg="http://schemas.microsoft.com/office/drawing/2016/SVG/main" r:embed="rId1"/>
               </a:ext>
             </a:extLst>
           </a:blip>
@@ -8294,13 +8294,13 @@
       <dgm:prSet presAssocID="{A76C417F-DA3C-4AC6-90E2-BBD9EC34529D}" presName="iconRect" presStyleLbl="node1" presStyleIdx="1" presStyleCnt="3"/>
       <dgm:spPr>
         <a:blipFill>
-          <a:blip xmlns:r="http://schemas.openxmlformats.org/officeDocument/2006/relationships" r:embed="rId3">
+          <a:blip xmlns:r="http://schemas.openxmlformats.org/officeDocument/2006/relationships">
             <a:extLst>
               <a:ext uri="{28A0092B-C50C-407E-A947-70E740481C1C}">
                 <a14:useLocalDpi xmlns:a14="http://schemas.microsoft.com/office/drawing/2010/main" val="0"/>
               </a:ext>
               <a:ext uri="{96DAC541-7B7A-43D3-8B79-37D633B846F1}">
-                <asvg:svgBlip xmlns:asvg="http://schemas.microsoft.com/office/drawing/2016/SVG/main" r:embed="rId4"/>
+                <asvg:svgBlip xmlns:asvg="http://schemas.microsoft.com/office/drawing/2016/SVG/main" r:embed="rId2"/>
               </a:ext>
             </a:extLst>
           </a:blip>
@@ -8347,13 +8347,13 @@
       <dgm:prSet presAssocID="{3BE97B77-8C0B-47A7-8674-1981056AE174}" presName="iconRect" presStyleLbl="node1" presStyleIdx="2" presStyleCnt="3"/>
       <dgm:spPr>
         <a:blipFill>
-          <a:blip xmlns:r="http://schemas.openxmlformats.org/officeDocument/2006/relationships" r:embed="rId5">
+          <a:blip xmlns:r="http://schemas.openxmlformats.org/officeDocument/2006/relationships">
             <a:extLst>
               <a:ext uri="{28A0092B-C50C-407E-A947-70E740481C1C}">
                 <a14:useLocalDpi xmlns:a14="http://schemas.microsoft.com/office/drawing/2010/main" val="0"/>
               </a:ext>
               <a:ext uri="{96DAC541-7B7A-43D3-8B79-37D633B846F1}">
-                <asvg:svgBlip xmlns:asvg="http://schemas.microsoft.com/office/drawing/2016/SVG/main" r:embed="rId6"/>
+                <asvg:svgBlip xmlns:asvg="http://schemas.microsoft.com/office/drawing/2016/SVG/main" r:embed="rId3"/>
               </a:ext>
             </a:extLst>
           </a:blip>
@@ -8485,13 +8485,13 @@
           <a:avLst/>
         </a:prstGeom>
         <a:blipFill>
-          <a:blip xmlns:r="http://schemas.openxmlformats.org/officeDocument/2006/relationships" r:embed="rId1">
+          <a:blip xmlns:r="http://schemas.openxmlformats.org/officeDocument/2006/relationships">
             <a:extLst>
               <a:ext uri="{28A0092B-C50C-407E-A947-70E740481C1C}">
                 <a14:useLocalDpi xmlns:a14="http://schemas.microsoft.com/office/drawing/2010/main" val="0"/>
               </a:ext>
               <a:ext uri="{96DAC541-7B7A-43D3-8B79-37D633B846F1}">
-                <asvg:svgBlip xmlns:asvg="http://schemas.microsoft.com/office/drawing/2016/SVG/main" r:embed="rId2"/>
+                <asvg:svgBlip xmlns:asvg="http://schemas.microsoft.com/office/drawing/2016/SVG/main" r:embed="rId1"/>
               </a:ext>
             </a:extLst>
           </a:blip>
@@ -8636,13 +8636,13 @@
           <a:avLst/>
         </a:prstGeom>
         <a:blipFill>
-          <a:blip xmlns:r="http://schemas.openxmlformats.org/officeDocument/2006/relationships" r:embed="rId3">
+          <a:blip xmlns:r="http://schemas.openxmlformats.org/officeDocument/2006/relationships">
             <a:extLst>
               <a:ext uri="{28A0092B-C50C-407E-A947-70E740481C1C}">
                 <a14:useLocalDpi xmlns:a14="http://schemas.microsoft.com/office/drawing/2010/main" val="0"/>
               </a:ext>
               <a:ext uri="{96DAC541-7B7A-43D3-8B79-37D633B846F1}">
-                <asvg:svgBlip xmlns:asvg="http://schemas.microsoft.com/office/drawing/2016/SVG/main" r:embed="rId4"/>
+                <asvg:svgBlip xmlns:asvg="http://schemas.microsoft.com/office/drawing/2016/SVG/main" r:embed="rId2"/>
               </a:ext>
             </a:extLst>
           </a:blip>
@@ -8787,13 +8787,13 @@
           <a:avLst/>
         </a:prstGeom>
         <a:blipFill>
-          <a:blip xmlns:r="http://schemas.openxmlformats.org/officeDocument/2006/relationships" r:embed="rId5">
+          <a:blip xmlns:r="http://schemas.openxmlformats.org/officeDocument/2006/relationships">
             <a:extLst>
               <a:ext uri="{28A0092B-C50C-407E-A947-70E740481C1C}">
                 <a14:useLocalDpi xmlns:a14="http://schemas.microsoft.com/office/drawing/2010/main" val="0"/>
               </a:ext>
               <a:ext uri="{96DAC541-7B7A-43D3-8B79-37D633B846F1}">
-                <asvg:svgBlip xmlns:asvg="http://schemas.microsoft.com/office/drawing/2016/SVG/main" r:embed="rId6"/>
+                <asvg:svgBlip xmlns:asvg="http://schemas.microsoft.com/office/drawing/2016/SVG/main" r:embed="rId3"/>
               </a:ext>
             </a:extLst>
           </a:blip>
@@ -8938,13 +8938,13 @@
           <a:avLst/>
         </a:prstGeom>
         <a:blipFill>
-          <a:blip xmlns:r="http://schemas.openxmlformats.org/officeDocument/2006/relationships" r:embed="rId7">
+          <a:blip xmlns:r="http://schemas.openxmlformats.org/officeDocument/2006/relationships">
             <a:extLst>
               <a:ext uri="{28A0092B-C50C-407E-A947-70E740481C1C}">
                 <a14:useLocalDpi xmlns:a14="http://schemas.microsoft.com/office/drawing/2010/main" val="0"/>
               </a:ext>
               <a:ext uri="{96DAC541-7B7A-43D3-8B79-37D633B846F1}">
-                <asvg:svgBlip xmlns:asvg="http://schemas.microsoft.com/office/drawing/2016/SVG/main" r:embed="rId8"/>
+                <asvg:svgBlip xmlns:asvg="http://schemas.microsoft.com/office/drawing/2016/SVG/main" r:embed="rId4"/>
               </a:ext>
             </a:extLst>
           </a:blip>
@@ -9089,13 +9089,13 @@
           <a:avLst/>
         </a:prstGeom>
         <a:blipFill>
-          <a:blip xmlns:r="http://schemas.openxmlformats.org/officeDocument/2006/relationships" r:embed="rId9">
+          <a:blip xmlns:r="http://schemas.openxmlformats.org/officeDocument/2006/relationships">
             <a:extLst>
               <a:ext uri="{28A0092B-C50C-407E-A947-70E740481C1C}">
                 <a14:useLocalDpi xmlns:a14="http://schemas.microsoft.com/office/drawing/2010/main" val="0"/>
               </a:ext>
               <a:ext uri="{96DAC541-7B7A-43D3-8B79-37D633B846F1}">
-                <asvg:svgBlip xmlns:asvg="http://schemas.microsoft.com/office/drawing/2016/SVG/main" r:embed="rId10"/>
+                <asvg:svgBlip xmlns:asvg="http://schemas.microsoft.com/office/drawing/2016/SVG/main" r:embed="rId5"/>
               </a:ext>
             </a:extLst>
           </a:blip>
@@ -9240,13 +9240,13 @@
           <a:avLst/>
         </a:prstGeom>
         <a:blipFill>
-          <a:blip xmlns:r="http://schemas.openxmlformats.org/officeDocument/2006/relationships" r:embed="rId11">
+          <a:blip xmlns:r="http://schemas.openxmlformats.org/officeDocument/2006/relationships">
             <a:extLst>
               <a:ext uri="{28A0092B-C50C-407E-A947-70E740481C1C}">
                 <a14:useLocalDpi xmlns:a14="http://schemas.microsoft.com/office/drawing/2010/main" val="0"/>
               </a:ext>
               <a:ext uri="{96DAC541-7B7A-43D3-8B79-37D633B846F1}">
-                <asvg:svgBlip xmlns:asvg="http://schemas.microsoft.com/office/drawing/2016/SVG/main" r:embed="rId12"/>
+                <asvg:svgBlip xmlns:asvg="http://schemas.microsoft.com/office/drawing/2016/SVG/main" r:embed="rId6"/>
               </a:ext>
             </a:extLst>
           </a:blip>
@@ -9403,13 +9403,13 @@
           <a:avLst/>
         </a:prstGeom>
         <a:blipFill>
-          <a:blip xmlns:r="http://schemas.openxmlformats.org/officeDocument/2006/relationships" r:embed="rId1">
+          <a:blip xmlns:r="http://schemas.openxmlformats.org/officeDocument/2006/relationships">
             <a:extLst>
               <a:ext uri="{28A0092B-C50C-407E-A947-70E740481C1C}">
                 <a14:useLocalDpi xmlns:a14="http://schemas.microsoft.com/office/drawing/2010/main" val="0"/>
               </a:ext>
               <a:ext uri="{96DAC541-7B7A-43D3-8B79-37D633B846F1}">
-                <asvg:svgBlip xmlns:asvg="http://schemas.microsoft.com/office/drawing/2016/SVG/main" r:embed="rId2"/>
+                <asvg:svgBlip xmlns:asvg="http://schemas.microsoft.com/office/drawing/2016/SVG/main" r:embed="rId1"/>
               </a:ext>
             </a:extLst>
           </a:blip>
@@ -9554,13 +9554,13 @@
           <a:avLst/>
         </a:prstGeom>
         <a:blipFill>
-          <a:blip xmlns:r="http://schemas.openxmlformats.org/officeDocument/2006/relationships" r:embed="rId3">
+          <a:blip xmlns:r="http://schemas.openxmlformats.org/officeDocument/2006/relationships">
             <a:extLst>
               <a:ext uri="{28A0092B-C50C-407E-A947-70E740481C1C}">
                 <a14:useLocalDpi xmlns:a14="http://schemas.microsoft.com/office/drawing/2010/main" val="0"/>
               </a:ext>
               <a:ext uri="{96DAC541-7B7A-43D3-8B79-37D633B846F1}">
-                <asvg:svgBlip xmlns:asvg="http://schemas.microsoft.com/office/drawing/2016/SVG/main" r:embed="rId4"/>
+                <asvg:svgBlip xmlns:asvg="http://schemas.microsoft.com/office/drawing/2016/SVG/main" r:embed="rId2"/>
               </a:ext>
             </a:extLst>
           </a:blip>
@@ -9705,13 +9705,13 @@
           <a:avLst/>
         </a:prstGeom>
         <a:blipFill>
-          <a:blip xmlns:r="http://schemas.openxmlformats.org/officeDocument/2006/relationships" r:embed="rId5">
+          <a:blip xmlns:r="http://schemas.openxmlformats.org/officeDocument/2006/relationships">
             <a:extLst>
               <a:ext uri="{28A0092B-C50C-407E-A947-70E740481C1C}">
                 <a14:useLocalDpi xmlns:a14="http://schemas.microsoft.com/office/drawing/2010/main" val="0"/>
               </a:ext>
               <a:ext uri="{96DAC541-7B7A-43D3-8B79-37D633B846F1}">
-                <asvg:svgBlip xmlns:asvg="http://schemas.microsoft.com/office/drawing/2016/SVG/main" r:embed="rId6"/>
+                <asvg:svgBlip xmlns:asvg="http://schemas.microsoft.com/office/drawing/2016/SVG/main" r:embed="rId3"/>
               </a:ext>
             </a:extLst>
           </a:blip>
@@ -10188,13 +10188,13 @@
           <a:avLst/>
         </a:prstGeom>
         <a:blipFill>
-          <a:blip xmlns:r="http://schemas.openxmlformats.org/officeDocument/2006/relationships" r:embed="rId1">
+          <a:blip xmlns:r="http://schemas.openxmlformats.org/officeDocument/2006/relationships">
             <a:extLst>
               <a:ext uri="{28A0092B-C50C-407E-A947-70E740481C1C}">
                 <a14:useLocalDpi xmlns:a14="http://schemas.microsoft.com/office/drawing/2010/main" val="0"/>
               </a:ext>
               <a:ext uri="{96DAC541-7B7A-43D3-8B79-37D633B846F1}">
-                <asvg:svgBlip xmlns:asvg="http://schemas.microsoft.com/office/drawing/2016/SVG/main" r:embed="rId2"/>
+                <asvg:svgBlip xmlns:asvg="http://schemas.microsoft.com/office/drawing/2016/SVG/main" r:embed="rId1"/>
               </a:ext>
             </a:extLst>
           </a:blip>
@@ -10339,13 +10339,13 @@
           <a:avLst/>
         </a:prstGeom>
         <a:blipFill>
-          <a:blip xmlns:r="http://schemas.openxmlformats.org/officeDocument/2006/relationships" r:embed="rId3">
+          <a:blip xmlns:r="http://schemas.openxmlformats.org/officeDocument/2006/relationships">
             <a:extLst>
               <a:ext uri="{28A0092B-C50C-407E-A947-70E740481C1C}">
                 <a14:useLocalDpi xmlns:a14="http://schemas.microsoft.com/office/drawing/2010/main" val="0"/>
               </a:ext>
               <a:ext uri="{96DAC541-7B7A-43D3-8B79-37D633B846F1}">
-                <asvg:svgBlip xmlns:asvg="http://schemas.microsoft.com/office/drawing/2016/SVG/main" r:embed="rId4"/>
+                <asvg:svgBlip xmlns:asvg="http://schemas.microsoft.com/office/drawing/2016/SVG/main" r:embed="rId2"/>
               </a:ext>
             </a:extLst>
           </a:blip>
@@ -10490,13 +10490,13 @@
           <a:avLst/>
         </a:prstGeom>
         <a:blipFill>
-          <a:blip xmlns:r="http://schemas.openxmlformats.org/officeDocument/2006/relationships" r:embed="rId5">
+          <a:blip xmlns:r="http://schemas.openxmlformats.org/officeDocument/2006/relationships">
             <a:extLst>
               <a:ext uri="{28A0092B-C50C-407E-A947-70E740481C1C}">
                 <a14:useLocalDpi xmlns:a14="http://schemas.microsoft.com/office/drawing/2010/main" val="0"/>
               </a:ext>
               <a:ext uri="{96DAC541-7B7A-43D3-8B79-37D633B846F1}">
-                <asvg:svgBlip xmlns:asvg="http://schemas.microsoft.com/office/drawing/2016/SVG/main" r:embed="rId6"/>
+                <asvg:svgBlip xmlns:asvg="http://schemas.microsoft.com/office/drawing/2016/SVG/main" r:embed="rId3"/>
               </a:ext>
             </a:extLst>
           </a:blip>
@@ -10611,13 +10611,13 @@
           <a:avLst/>
         </a:prstGeom>
         <a:blipFill>
-          <a:blip xmlns:r="http://schemas.openxmlformats.org/officeDocument/2006/relationships" r:embed="rId1">
+          <a:blip xmlns:r="http://schemas.openxmlformats.org/officeDocument/2006/relationships">
             <a:extLst>
               <a:ext uri="{28A0092B-C50C-407E-A947-70E740481C1C}">
                 <a14:useLocalDpi xmlns:a14="http://schemas.microsoft.com/office/drawing/2010/main" val="0"/>
               </a:ext>
               <a:ext uri="{96DAC541-7B7A-43D3-8B79-37D633B846F1}">
-                <asvg:svgBlip xmlns:asvg="http://schemas.microsoft.com/office/drawing/2016/SVG/main" r:embed="rId2"/>
+                <asvg:svgBlip xmlns:asvg="http://schemas.microsoft.com/office/drawing/2016/SVG/main" r:embed="rId1"/>
               </a:ext>
             </a:extLst>
           </a:blip>
@@ -10720,13 +10720,13 @@
           <a:avLst/>
         </a:prstGeom>
         <a:blipFill>
-          <a:blip xmlns:r="http://schemas.openxmlformats.org/officeDocument/2006/relationships" r:embed="rId3">
+          <a:blip xmlns:r="http://schemas.openxmlformats.org/officeDocument/2006/relationships">
             <a:extLst>
               <a:ext uri="{28A0092B-C50C-407E-A947-70E740481C1C}">
                 <a14:useLocalDpi xmlns:a14="http://schemas.microsoft.com/office/drawing/2010/main" val="0"/>
               </a:ext>
               <a:ext uri="{96DAC541-7B7A-43D3-8B79-37D633B846F1}">
-                <asvg:svgBlip xmlns:asvg="http://schemas.microsoft.com/office/drawing/2016/SVG/main" r:embed="rId4"/>
+                <asvg:svgBlip xmlns:asvg="http://schemas.microsoft.com/office/drawing/2016/SVG/main" r:embed="rId2"/>
               </a:ext>
             </a:extLst>
           </a:blip>
@@ -10829,13 +10829,13 @@
           <a:avLst/>
         </a:prstGeom>
         <a:blipFill>
-          <a:blip xmlns:r="http://schemas.openxmlformats.org/officeDocument/2006/relationships" r:embed="rId5">
+          <a:blip xmlns:r="http://schemas.openxmlformats.org/officeDocument/2006/relationships">
             <a:extLst>
               <a:ext uri="{28A0092B-C50C-407E-A947-70E740481C1C}">
                 <a14:useLocalDpi xmlns:a14="http://schemas.microsoft.com/office/drawing/2010/main" val="0"/>
               </a:ext>
               <a:ext uri="{96DAC541-7B7A-43D3-8B79-37D633B846F1}">
-                <asvg:svgBlip xmlns:asvg="http://schemas.microsoft.com/office/drawing/2016/SVG/main" r:embed="rId6"/>
+                <asvg:svgBlip xmlns:asvg="http://schemas.microsoft.com/office/drawing/2016/SVG/main" r:embed="rId3"/>
               </a:ext>
             </a:extLst>
           </a:blip>
@@ -10938,13 +10938,13 @@
           <a:avLst/>
         </a:prstGeom>
         <a:blipFill>
-          <a:blip xmlns:r="http://schemas.openxmlformats.org/officeDocument/2006/relationships" r:embed="rId7">
+          <a:blip xmlns:r="http://schemas.openxmlformats.org/officeDocument/2006/relationships">
             <a:extLst>
               <a:ext uri="{28A0092B-C50C-407E-A947-70E740481C1C}">
                 <a14:useLocalDpi xmlns:a14="http://schemas.microsoft.com/office/drawing/2010/main" val="0"/>
               </a:ext>
               <a:ext uri="{96DAC541-7B7A-43D3-8B79-37D633B846F1}">
-                <asvg:svgBlip xmlns:asvg="http://schemas.microsoft.com/office/drawing/2016/SVG/main" r:embed="rId8"/>
+                <asvg:svgBlip xmlns:asvg="http://schemas.microsoft.com/office/drawing/2016/SVG/main" r:embed="rId4"/>
               </a:ext>
             </a:extLst>
           </a:blip>
@@ -11098,13 +11098,13 @@
           <a:avLst/>
         </a:prstGeom>
         <a:blipFill>
-          <a:blip xmlns:r="http://schemas.openxmlformats.org/officeDocument/2006/relationships" r:embed="rId1">
+          <a:blip xmlns:r="http://schemas.openxmlformats.org/officeDocument/2006/relationships">
             <a:extLst>
               <a:ext uri="{28A0092B-C50C-407E-A947-70E740481C1C}">
                 <a14:useLocalDpi xmlns:a14="http://schemas.microsoft.com/office/drawing/2010/main" val="0"/>
               </a:ext>
               <a:ext uri="{96DAC541-7B7A-43D3-8B79-37D633B846F1}">
-                <asvg:svgBlip xmlns:asvg="http://schemas.microsoft.com/office/drawing/2016/SVG/main" r:embed="rId2"/>
+                <asvg:svgBlip xmlns:asvg="http://schemas.microsoft.com/office/drawing/2016/SVG/main" r:embed="rId1"/>
               </a:ext>
             </a:extLst>
           </a:blip>
@@ -11247,13 +11247,13 @@
           <a:avLst/>
         </a:prstGeom>
         <a:blipFill>
-          <a:blip xmlns:r="http://schemas.openxmlformats.org/officeDocument/2006/relationships" r:embed="rId3">
+          <a:blip xmlns:r="http://schemas.openxmlformats.org/officeDocument/2006/relationships">
             <a:extLst>
               <a:ext uri="{28A0092B-C50C-407E-A947-70E740481C1C}">
                 <a14:useLocalDpi xmlns:a14="http://schemas.microsoft.com/office/drawing/2010/main" val="0"/>
               </a:ext>
               <a:ext uri="{96DAC541-7B7A-43D3-8B79-37D633B846F1}">
-                <asvg:svgBlip xmlns:asvg="http://schemas.microsoft.com/office/drawing/2016/SVG/main" r:embed="rId4"/>
+                <asvg:svgBlip xmlns:asvg="http://schemas.microsoft.com/office/drawing/2016/SVG/main" r:embed="rId2"/>
               </a:ext>
             </a:extLst>
           </a:blip>
@@ -11396,13 +11396,13 @@
           <a:avLst/>
         </a:prstGeom>
         <a:blipFill>
-          <a:blip xmlns:r="http://schemas.openxmlformats.org/officeDocument/2006/relationships" r:embed="rId5">
+          <a:blip xmlns:r="http://schemas.openxmlformats.org/officeDocument/2006/relationships">
             <a:extLst>
               <a:ext uri="{28A0092B-C50C-407E-A947-70E740481C1C}">
                 <a14:useLocalDpi xmlns:a14="http://schemas.microsoft.com/office/drawing/2010/main" val="0"/>
               </a:ext>
               <a:ext uri="{96DAC541-7B7A-43D3-8B79-37D633B846F1}">
-                <asvg:svgBlip xmlns:asvg="http://schemas.microsoft.com/office/drawing/2016/SVG/main" r:embed="rId6"/>
+                <asvg:svgBlip xmlns:asvg="http://schemas.microsoft.com/office/drawing/2016/SVG/main" r:embed="rId3"/>
               </a:ext>
             </a:extLst>
           </a:blip>
@@ -11560,13 +11560,13 @@
           <a:avLst/>
         </a:prstGeom>
         <a:blipFill>
-          <a:blip xmlns:r="http://schemas.openxmlformats.org/officeDocument/2006/relationships" r:embed="rId1">
+          <a:blip xmlns:r="http://schemas.openxmlformats.org/officeDocument/2006/relationships">
             <a:extLst>
               <a:ext uri="{28A0092B-C50C-407E-A947-70E740481C1C}">
                 <a14:useLocalDpi xmlns:a14="http://schemas.microsoft.com/office/drawing/2010/main" val="0"/>
               </a:ext>
               <a:ext uri="{96DAC541-7B7A-43D3-8B79-37D633B846F1}">
-                <asvg:svgBlip xmlns:asvg="http://schemas.microsoft.com/office/drawing/2016/SVG/main" r:embed="rId2"/>
+                <asvg:svgBlip xmlns:asvg="http://schemas.microsoft.com/office/drawing/2016/SVG/main" r:embed="rId1"/>
               </a:ext>
             </a:extLst>
           </a:blip>
@@ -11711,13 +11711,13 @@
           <a:avLst/>
         </a:prstGeom>
         <a:blipFill>
-          <a:blip xmlns:r="http://schemas.openxmlformats.org/officeDocument/2006/relationships" r:embed="rId3">
+          <a:blip xmlns:r="http://schemas.openxmlformats.org/officeDocument/2006/relationships">
             <a:extLst>
               <a:ext uri="{28A0092B-C50C-407E-A947-70E740481C1C}">
                 <a14:useLocalDpi xmlns:a14="http://schemas.microsoft.com/office/drawing/2010/main" val="0"/>
               </a:ext>
               <a:ext uri="{96DAC541-7B7A-43D3-8B79-37D633B846F1}">
-                <asvg:svgBlip xmlns:asvg="http://schemas.microsoft.com/office/drawing/2016/SVG/main" r:embed="rId4"/>
+                <asvg:svgBlip xmlns:asvg="http://schemas.microsoft.com/office/drawing/2016/SVG/main" r:embed="rId2"/>
               </a:ext>
             </a:extLst>
           </a:blip>
@@ -11862,13 +11862,13 @@
           <a:avLst/>
         </a:prstGeom>
         <a:blipFill>
-          <a:blip xmlns:r="http://schemas.openxmlformats.org/officeDocument/2006/relationships" r:embed="rId5">
+          <a:blip xmlns:r="http://schemas.openxmlformats.org/officeDocument/2006/relationships">
             <a:extLst>
               <a:ext uri="{28A0092B-C50C-407E-A947-70E740481C1C}">
                 <a14:useLocalDpi xmlns:a14="http://schemas.microsoft.com/office/drawing/2010/main" val="0"/>
               </a:ext>
               <a:ext uri="{96DAC541-7B7A-43D3-8B79-37D633B846F1}">
-                <asvg:svgBlip xmlns:asvg="http://schemas.microsoft.com/office/drawing/2016/SVG/main" r:embed="rId6"/>
+                <asvg:svgBlip xmlns:asvg="http://schemas.microsoft.com/office/drawing/2016/SVG/main" r:embed="rId3"/>
               </a:ext>
             </a:extLst>
           </a:blip>
@@ -27580,7 +27580,7 @@
           <a:p>
             <a:fld id="{5BCAD085-E8A6-8845-BD4E-CB4CCA059FC4}" type="datetimeFigureOut">
               <a:rPr lang="en-US" smtClean="0"/>
-              <a:t>3/17/2026</a:t>
+              <a:t>5/20/2026</a:t>
             </a:fld>
             <a:endParaRPr lang="en-US"/>
           </a:p>
@@ -27787,7 +27787,7 @@
           <a:p>
             <a:fld id="{5BCAD085-E8A6-8845-BD4E-CB4CCA059FC4}" type="datetimeFigureOut">
               <a:rPr lang="en-US" smtClean="0"/>
-              <a:t>3/17/2026</a:t>
+              <a:t>5/20/2026</a:t>
             </a:fld>
             <a:endParaRPr lang="en-US"/>
           </a:p>
@@ -27967,7 +27967,7 @@
           <a:p>
             <a:fld id="{5BCAD085-E8A6-8845-BD4E-CB4CCA059FC4}" type="datetimeFigureOut">
               <a:rPr lang="en-US" smtClean="0"/>
-              <a:t>3/17/2026</a:t>
+              <a:t>5/20/2026</a:t>
             </a:fld>
             <a:endParaRPr lang="en-US"/>
           </a:p>
@@ -28172,7 +28172,7 @@
           <a:p>
             <a:fld id="{5BCAD085-E8A6-8845-BD4E-CB4CCA059FC4}" type="datetimeFigureOut">
               <a:rPr lang="en-US" smtClean="0"/>
-              <a:t>3/17/2026</a:t>
+              <a:t>5/20/2026</a:t>
             </a:fld>
             <a:endParaRPr lang="en-US"/>
           </a:p>
@@ -34910,7 +34910,7 @@
           <a:p>
             <a:fld id="{5BCAD085-E8A6-8845-BD4E-CB4CCA059FC4}" type="datetimeFigureOut">
               <a:rPr lang="en-US" smtClean="0"/>
-              <a:t>3/17/2026</a:t>
+              <a:t>5/20/2026</a:t>
             </a:fld>
             <a:endParaRPr lang="en-US"/>
           </a:p>
@@ -35184,7 +35184,7 @@
           <a:p>
             <a:fld id="{5BCAD085-E8A6-8845-BD4E-CB4CCA059FC4}" type="datetimeFigureOut">
               <a:rPr lang="en-US" smtClean="0"/>
-              <a:t>3/17/2026</a:t>
+              <a:t>5/20/2026</a:t>
             </a:fld>
             <a:endParaRPr lang="en-US"/>
           </a:p>
@@ -35587,7 +35587,7 @@
           <a:p>
             <a:fld id="{5BCAD085-E8A6-8845-BD4E-CB4CCA059FC4}" type="datetimeFigureOut">
               <a:rPr lang="en-US" smtClean="0"/>
-              <a:t>3/17/2026</a:t>
+              <a:t>5/20/2026</a:t>
             </a:fld>
             <a:endParaRPr lang="en-US"/>
           </a:p>
@@ -35705,7 +35705,7 @@
           <a:p>
             <a:fld id="{5BCAD085-E8A6-8845-BD4E-CB4CCA059FC4}" type="datetimeFigureOut">
               <a:rPr lang="en-US" smtClean="0"/>
-              <a:t>3/17/2026</a:t>
+              <a:t>5/20/2026</a:t>
             </a:fld>
             <a:endParaRPr lang="en-US"/>
           </a:p>
@@ -35800,7 +35800,7 @@
           <a:p>
             <a:fld id="{5BCAD085-E8A6-8845-BD4E-CB4CCA059FC4}" type="datetimeFigureOut">
               <a:rPr lang="en-US" smtClean="0"/>
-              <a:t>3/17/2026</a:t>
+              <a:t>5/20/2026</a:t>
             </a:fld>
             <a:endParaRPr lang="en-US"/>
           </a:p>
@@ -36092,7 +36092,7 @@
           <a:p>
             <a:fld id="{5BCAD085-E8A6-8845-BD4E-CB4CCA059FC4}" type="datetimeFigureOut">
               <a:rPr lang="en-US" smtClean="0"/>
-              <a:t>3/17/2026</a:t>
+              <a:t>5/20/2026</a:t>
             </a:fld>
             <a:endParaRPr lang="en-US"/>
           </a:p>
@@ -36372,7 +36372,7 @@
           <a:p>
             <a:fld id="{5BCAD085-E8A6-8845-BD4E-CB4CCA059FC4}" type="datetimeFigureOut">
               <a:rPr lang="en-US" smtClean="0"/>
-              <a:t>3/17/2026</a:t>
+              <a:t>5/20/2026</a:t>
             </a:fld>
             <a:endParaRPr lang="en-US"/>
           </a:p>
@@ -36622,7 +36622,7 @@
           <a:p>
             <a:fld id="{5BCAD085-E8A6-8845-BD4E-CB4CCA059FC4}" type="datetimeFigureOut">
               <a:rPr lang="en-US" smtClean="0"/>
-              <a:t>3/17/2026</a:t>
+              <a:t>5/20/2026</a:t>
             </a:fld>
             <a:endParaRPr lang="en-US"/>
           </a:p>
@@ -37113,7 +37113,7 @@
     <p:bg>
       <p:bgPr>
         <a:solidFill>
-          <a:schemeClr val="bg1"/>
+          <a:srgbClr val="0D1B2A"/>
         </a:solidFill>
         <a:effectLst/>
       </p:bgPr>
@@ -37164,7 +37164,7 @@
             <a:avLst/>
           </a:prstGeom>
           <a:solidFill>
-            <a:schemeClr val="accent1"/>
+            <a:srgbClr val="00B4D8"/>
           </a:solidFill>
           <a:ln>
             <a:noFill/>
@@ -37218,7 +37218,7 @@
           <a:lstStyle/>
           <a:p>
             <a:r>
-              <a:rPr lang="en-US">
+              <a:rPr lang="en-US" sz="2000">
                 <a:solidFill>
                   <a:srgbClr val="FFFFFF"/>
                 </a:solidFill>
@@ -37273,7 +37273,7 @@
     <p:bg>
       <p:bgPr>
         <a:solidFill>
-          <a:schemeClr val="bg1"/>
+          <a:srgbClr val="0D1B2A"/>
         </a:solidFill>
         <a:effectLst/>
       </p:bgPr>
@@ -37292,7 +37292,7 @@
           <a:chExt cx="0" cy="0"/>
         </a:xfrm>
       </p:grpSpPr>
-      <p:sp useBgFill="1">
+      <p:sp>
         <p:nvSpPr>
           <p:cNvPr id="8" name="Rectangle 7">
             <a:extLst>
@@ -37323,6 +37323,9 @@
           <a:prstGeom prst="rect">
             <a:avLst/>
           </a:prstGeom>
+          <a:solidFill>
+            <a:srgbClr val="0D1B2A"/>
+          </a:solidFill>
           <a:ln>
             <a:noFill/>
           </a:ln>
@@ -37383,6 +37386,9 @@
           <a:prstGeom prst="rect">
             <a:avLst/>
           </a:prstGeom>
+          <a:solidFill>
+            <a:srgbClr val="00B4D8"/>
+          </a:solidFill>
           <a:ln>
             <a:noFill/>
           </a:ln>
@@ -37434,9 +37440,9 @@
           </a:bodyPr>
           <a:lstStyle/>
           <a:p>
-            <a:pPr algn="r"/>
+            <a:pPr algn="l"/>
             <a:r>
-              <a:rPr lang="en-IN">
+              <a:rPr lang="en-IN" sz="2000">
                 <a:solidFill>
                   <a:srgbClr val="FFFFFF"/>
                 </a:solidFill>
@@ -37463,26 +37469,114 @@
           </a:xfrm>
         </p:spPr>
         <p:txBody>
-          <a:bodyPr anchor="ctr">
+          <a:bodyPr anchor="t">
             <a:normAutofit/>
           </a:bodyPr>
           <a:lstStyle/>
           <a:p>
             <a:r>
-              <a:t>• Compares objects</a:t>
+              <a:rPr lang="en-US" sz="1800" b="1">
+                <a:solidFill>
+                  <a:srgbClr val="00B4D8"/>
+                </a:solidFill>
+              </a:rPr>
+              <a:t>Default Behavior</a:t>
             </a:r>
           </a:p>
           <a:p>
             <a:r>
-              <a:t>• Reference vs Value comparison</a:t>
+              <a:rPr lang="en-US" sz="1400">
+                <a:solidFill>
+                  <a:srgbClr val="FFFFFF"/>
+                </a:solidFill>
+              </a:rPr>
+              <a:t>Reference types: compares memory addresses</a:t>
             </a:r>
           </a:p>
           <a:p>
-            <a:endParaRPr/>
+            <a:r>
+              <a:rPr lang="en-US" sz="1400">
+                <a:solidFill>
+                  <a:srgbClr val="FFFFFF"/>
+                </a:solidFill>
+              </a:rPr>
+              <a:t>Value types: compares field values via reflection</a:t>
+            </a:r>
+          </a:p>
+          <a:p>
+            <a:endParaRPr lang="en-US" sz="800"/>
           </a:p>
           <a:p>
             <a:r>
-              <a:t>Override for custom equality</a:t>
+              <a:rPr lang="en-US" sz="1800" b="1">
+                <a:solidFill>
+                  <a:srgbClr val="00B4D8"/>
+                </a:solidFill>
+              </a:rPr>
+              <a:t>Overriding Equals()</a:t>
+            </a:r>
+          </a:p>
+          <a:p>
+            <a:r>
+              <a:rPr lang="en-US" sz="1400">
+                <a:solidFill>
+                  <a:srgbClr val="FFFFFF"/>
+                </a:solidFill>
+              </a:rPr>
+              <a:t>Check for null and type mismatch first</a:t>
+            </a:r>
+          </a:p>
+          <a:p>
+            <a:r>
+              <a:rPr lang="en-US" sz="1400">
+                <a:solidFill>
+                  <a:srgbClr val="FFFFFF"/>
+                </a:solidFill>
+              </a:rPr>
+              <a:t>Compare meaningful properties for equality</a:t>
+            </a:r>
+          </a:p>
+          <a:p>
+            <a:r>
+              <a:rPr lang="en-US" sz="1400">
+                <a:solidFill>
+                  <a:srgbClr val="FFFFFF"/>
+                </a:solidFill>
+              </a:rPr>
+              <a:t>Always override GetHashCode() when overriding Equals()</a:t>
+            </a:r>
+          </a:p>
+          <a:p>
+            <a:endParaRPr lang="en-US" sz="800"/>
+          </a:p>
+          <a:p>
+            <a:r>
+              <a:rPr lang="en-US" sz="1800" b="1">
+                <a:solidFill>
+                  <a:srgbClr val="00B4D8"/>
+                </a:solidFill>
+              </a:rPr>
+              <a:t>Best Practice</a:t>
+            </a:r>
+          </a:p>
+          <a:p>
+            <a:r>
+              <a:rPr lang="en-US" sz="1400">
+                <a:solidFill>
+                  <a:srgbClr val="FFFFFF"/>
+                </a:solidFill>
+              </a:rPr>
+              <a:t>Implement IEquatable&lt;T&gt; for type-safe equality</a:t>
+            </a:r>
+          </a:p>
+          <a:p>
+            <a:r>
+              <a:rPr lang="en-US" sz="1400">
+                <a:solidFill>
+                  <a:srgbClr val="FFFFFF"/>
+                </a:solidFill>
+              </a:rPr>
+              <a:t>Consider overriding == and != operators too</a:t>
             </a:r>
           </a:p>
         </p:txBody>
@@ -37501,7 +37595,7 @@
     <p:bg>
       <p:bgPr>
         <a:solidFill>
-          <a:schemeClr val="bg1"/>
+          <a:srgbClr val="0D1B2A"/>
         </a:solidFill>
         <a:effectLst/>
       </p:bgPr>
@@ -37552,7 +37646,7 @@
             <a:avLst/>
           </a:prstGeom>
           <a:solidFill>
-            <a:schemeClr val="accent1"/>
+            <a:srgbClr val="00B4D8"/>
           </a:solidFill>
           <a:ln>
             <a:noFill/>
@@ -37606,7 +37700,7 @@
           <a:lstStyle/>
           <a:p>
             <a:r>
-              <a:rPr lang="en-IN" sz="4100">
+              <a:rPr lang="en-IN" sz="2000">
                 <a:solidFill>
                   <a:srgbClr val="FFFFFF"/>
                 </a:solidFill>
@@ -37661,7 +37755,7 @@
     <p:bg>
       <p:bgPr>
         <a:solidFill>
-          <a:schemeClr val="bg1"/>
+          <a:srgbClr val="0D1B2A"/>
         </a:solidFill>
         <a:effectLst/>
       </p:bgPr>
@@ -37712,7 +37806,7 @@
             <a:avLst/>
           </a:prstGeom>
           <a:solidFill>
-            <a:schemeClr val="accent1"/>
+            <a:srgbClr val="00B4D8"/>
           </a:solidFill>
           <a:ln>
             <a:noFill/>
@@ -37766,7 +37860,7 @@
           <a:lstStyle/>
           <a:p>
             <a:r>
-              <a:rPr lang="en-IN">
+              <a:rPr lang="en-IN" sz="2000">
                 <a:solidFill>
                   <a:srgbClr val="FFFFFF"/>
                 </a:solidFill>
@@ -37821,7 +37915,7 @@
     <p:bg>
       <p:bgPr>
         <a:solidFill>
-          <a:schemeClr val="bg1"/>
+          <a:srgbClr val="0D1B2A"/>
         </a:solidFill>
         <a:effectLst/>
       </p:bgPr>
@@ -37840,7 +37934,7 @@
           <a:chExt cx="0" cy="0"/>
         </a:xfrm>
       </p:grpSpPr>
-      <p:sp useBgFill="1">
+      <p:sp>
         <p:nvSpPr>
           <p:cNvPr id="8" name="Rectangle 7">
             <a:extLst>
@@ -37871,6 +37965,9 @@
           <a:prstGeom prst="rect">
             <a:avLst/>
           </a:prstGeom>
+          <a:solidFill>
+            <a:srgbClr val="0D1B2A"/>
+          </a:solidFill>
           <a:ln>
             <a:noFill/>
           </a:ln>
@@ -37931,6 +38028,9 @@
           <a:prstGeom prst="rect">
             <a:avLst/>
           </a:prstGeom>
+          <a:solidFill>
+            <a:srgbClr val="00B4D8"/>
+          </a:solidFill>
           <a:ln>
             <a:noFill/>
           </a:ln>
@@ -37982,9 +38082,9 @@
           </a:bodyPr>
           <a:lstStyle/>
           <a:p>
-            <a:pPr algn="r"/>
+            <a:pPr algn="l"/>
             <a:r>
-              <a:rPr lang="en-IN">
+              <a:rPr lang="en-IN" sz="2000">
                 <a:solidFill>
                   <a:srgbClr val="FFFFFF"/>
                 </a:solidFill>
@@ -38011,18 +38111,104 @@
           </a:xfrm>
         </p:spPr>
         <p:txBody>
-          <a:bodyPr anchor="ctr">
+          <a:bodyPr anchor="t">
             <a:normAutofit/>
           </a:bodyPr>
           <a:lstStyle/>
           <a:p>
             <a:r>
-              <a:t>• Returns string representation</a:t>
+              <a:rPr lang="en-US" sz="1800" b="1">
+                <a:solidFill>
+                  <a:srgbClr val="00B4D8"/>
+                </a:solidFill>
+              </a:rPr>
+              <a:t>What It Does</a:t>
             </a:r>
           </a:p>
           <a:p>
             <a:r>
-              <a:t>Override for meaningful output</a:t>
+              <a:rPr lang="en-US" sz="1400">
+                <a:solidFill>
+                  <a:srgbClr val="FFFFFF"/>
+                </a:solidFill>
+              </a:rPr>
+              <a:t>Returns a human-readable string representation</a:t>
+            </a:r>
+          </a:p>
+          <a:p>
+            <a:r>
+              <a:rPr lang="en-US" sz="1400">
+                <a:solidFill>
+                  <a:srgbClr val="FFFFFF"/>
+                </a:solidFill>
+              </a:rPr>
+              <a:t>Default: returns the fully qualified type name</a:t>
+            </a:r>
+          </a:p>
+          <a:p>
+            <a:endParaRPr lang="en-US" sz="800"/>
+          </a:p>
+          <a:p>
+            <a:r>
+              <a:rPr lang="en-US" sz="1800" b="1">
+                <a:solidFill>
+                  <a:srgbClr val="00B4D8"/>
+                </a:solidFill>
+              </a:rPr>
+              <a:t>Why Override?</a:t>
+            </a:r>
+          </a:p>
+          <a:p>
+            <a:r>
+              <a:rPr lang="en-US" sz="1400">
+                <a:solidFill>
+                  <a:srgbClr val="FFFFFF"/>
+                </a:solidFill>
+              </a:rPr>
+              <a:t>Debugging: meaningful output in watch windows</a:t>
+            </a:r>
+          </a:p>
+          <a:p>
+            <a:r>
+              <a:rPr lang="en-US" sz="1400">
+                <a:solidFill>
+                  <a:srgbClr val="FFFFFF"/>
+                </a:solidFill>
+              </a:rPr>
+              <a:t>Logging: readable entries in log files</a:t>
+            </a:r>
+          </a:p>
+          <a:p>
+            <a:r>
+              <a:rPr lang="en-US" sz="1400">
+                <a:solidFill>
+                  <a:srgbClr val="FFFFFF"/>
+                </a:solidFill>
+              </a:rPr>
+              <a:t>UI display: Console.WriteLine(obj) calls ToString()</a:t>
+            </a:r>
+          </a:p>
+          <a:p>
+            <a:endParaRPr lang="en-US" sz="800"/>
+          </a:p>
+          <a:p>
+            <a:r>
+              <a:rPr lang="en-US" sz="1800" b="1">
+                <a:solidFill>
+                  <a:srgbClr val="00B4D8"/>
+                </a:solidFill>
+              </a:rPr>
+              <a:t>Tip</a:t>
+            </a:r>
+          </a:p>
+          <a:p>
+            <a:r>
+              <a:rPr lang="en-US" sz="1400">
+                <a:solidFill>
+                  <a:srgbClr val="FFFFFF"/>
+                </a:solidFill>
+              </a:rPr>
+              <a:t>Use string interpolation for clean formatting</a:t>
             </a:r>
           </a:p>
         </p:txBody>
@@ -38041,7 +38227,7 @@
     <p:bg>
       <p:bgPr>
         <a:solidFill>
-          <a:schemeClr val="bg1"/>
+          <a:srgbClr val="0D1B2A"/>
         </a:solidFill>
         <a:effectLst/>
       </p:bgPr>
@@ -38060,7 +38246,7 @@
           <a:chExt cx="0" cy="0"/>
         </a:xfrm>
       </p:grpSpPr>
-      <p:sp useBgFill="1">
+      <p:sp>
         <p:nvSpPr>
           <p:cNvPr id="8" name="Rectangle 7">
             <a:extLst>
@@ -38091,6 +38277,9 @@
           <a:prstGeom prst="rect">
             <a:avLst/>
           </a:prstGeom>
+          <a:solidFill>
+            <a:srgbClr val="0D1B2A"/>
+          </a:solidFill>
           <a:ln>
             <a:noFill/>
           </a:ln>
@@ -38151,6 +38340,9 @@
           <a:prstGeom prst="rect">
             <a:avLst/>
           </a:prstGeom>
+          <a:solidFill>
+            <a:srgbClr val="00B4D8"/>
+          </a:solidFill>
           <a:ln>
             <a:noFill/>
           </a:ln>
@@ -38202,9 +38394,9 @@
           </a:bodyPr>
           <a:lstStyle/>
           <a:p>
-            <a:pPr algn="r"/>
+            <a:pPr algn="l"/>
             <a:r>
-              <a:rPr lang="en-IN">
+              <a:rPr lang="en-IN" sz="2000">
                 <a:solidFill>
                   <a:srgbClr val="FFFFFF"/>
                 </a:solidFill>
@@ -38231,36 +38423,114 @@
           </a:xfrm>
         </p:spPr>
         <p:txBody>
-          <a:bodyPr anchor="ctr">
+          <a:bodyPr anchor="t">
             <a:normAutofit/>
           </a:bodyPr>
           <a:lstStyle/>
           <a:p>
             <a:r>
-              <a:t>• is → type checking</a:t>
+              <a:rPr lang="en-US" sz="1800" b="1">
+                <a:solidFill>
+                  <a:srgbClr val="00B4D8"/>
+                </a:solidFill>
+              </a:rPr>
+              <a:t>The is Operator</a:t>
             </a:r>
           </a:p>
           <a:p>
             <a:r>
-              <a:t>• as → safe casting</a:t>
-            </a:r>
-          </a:p>
-          <a:p>
-            <a:endParaRPr/>
-          </a:p>
-          <a:p>
-            <a:r>
-              <a:t>Example:</a:t>
+              <a:rPr lang="en-US" sz="1400">
+                <a:solidFill>
+                  <a:srgbClr val="FFFFFF"/>
+                </a:solidFill>
+              </a:rPr>
+              <a:t>Checks if an object is of a given type</a:t>
             </a:r>
           </a:p>
           <a:p>
             <a:r>
-              <a:t>if(obj is Person)</a:t>
+              <a:rPr lang="en-US" sz="1400">
+                <a:solidFill>
+                  <a:srgbClr val="FFFFFF"/>
+                </a:solidFill>
+              </a:rPr>
+              <a:t>Returns true or false without throwing exceptions</a:t>
             </a:r>
           </a:p>
           <a:p>
             <a:r>
-              <a:t>Person p = obj as Person</a:t>
+              <a:rPr lang="en-US" sz="1400">
+                <a:solidFill>
+                  <a:srgbClr val="FFFFFF"/>
+                </a:solidFill>
+              </a:rPr>
+              <a:t>C# 7+: pattern matching with is (if obj is Person p)</a:t>
+            </a:r>
+          </a:p>
+          <a:p>
+            <a:endParaRPr lang="en-US" sz="800"/>
+          </a:p>
+          <a:p>
+            <a:r>
+              <a:rPr lang="en-US" sz="1800" b="1">
+                <a:solidFill>
+                  <a:srgbClr val="00B4D8"/>
+                </a:solidFill>
+              </a:rPr>
+              <a:t>The as Operator</a:t>
+            </a:r>
+          </a:p>
+          <a:p>
+            <a:r>
+              <a:rPr lang="en-US" sz="1400">
+                <a:solidFill>
+                  <a:srgbClr val="FFFFFF"/>
+                </a:solidFill>
+              </a:rPr>
+              <a:t>Attempts safe cast, returns null on failure</a:t>
+            </a:r>
+          </a:p>
+          <a:p>
+            <a:r>
+              <a:rPr lang="en-US" sz="1400">
+                <a:solidFill>
+                  <a:srgbClr val="FFFFFF"/>
+                </a:solidFill>
+              </a:rPr>
+              <a:t>Only works with reference and nullable types</a:t>
+            </a:r>
+          </a:p>
+          <a:p>
+            <a:r>
+              <a:rPr lang="en-US" sz="1400">
+                <a:solidFill>
+                  <a:srgbClr val="FFFFFF"/>
+                </a:solidFill>
+              </a:rPr>
+              <a:t>No exception thrown, unlike direct (Type) casting</a:t>
+            </a:r>
+          </a:p>
+          <a:p>
+            <a:endParaRPr lang="en-US" sz="800"/>
+          </a:p>
+          <a:p>
+            <a:r>
+              <a:rPr lang="en-US" sz="1800" b="1">
+                <a:solidFill>
+                  <a:srgbClr val="00B4D8"/>
+                </a:solidFill>
+              </a:rPr>
+              <a:t>When to Use</a:t>
+            </a:r>
+          </a:p>
+          <a:p>
+            <a:r>
+              <a:rPr lang="en-US" sz="1400">
+                <a:solidFill>
+                  <a:srgbClr val="FFFFFF"/>
+                </a:solidFill>
+              </a:rPr>
+              <a:t>Prefer is with pattern matching in modern C# code</a:t>
             </a:r>
           </a:p>
         </p:txBody>
@@ -38279,7 +38549,7 @@
     <p:bg>
       <p:bgPr>
         <a:solidFill>
-          <a:schemeClr val="bg1"/>
+          <a:srgbClr val="0D1B2A"/>
         </a:solidFill>
         <a:effectLst/>
       </p:bgPr>
@@ -38298,7 +38568,7 @@
           <a:chExt cx="0" cy="0"/>
         </a:xfrm>
       </p:grpSpPr>
-      <p:sp useBgFill="1">
+      <p:sp>
         <p:nvSpPr>
           <p:cNvPr id="8" name="Rectangle 7">
             <a:extLst>
@@ -38329,6 +38599,9 @@
           <a:prstGeom prst="rect">
             <a:avLst/>
           </a:prstGeom>
+          <a:solidFill>
+            <a:srgbClr val="0D1B2A"/>
+          </a:solidFill>
           <a:ln>
             <a:noFill/>
           </a:ln>
@@ -38389,6 +38662,9 @@
           <a:prstGeom prst="rect">
             <a:avLst/>
           </a:prstGeom>
+          <a:solidFill>
+            <a:srgbClr val="00B4D8"/>
+          </a:solidFill>
           <a:ln>
             <a:noFill/>
           </a:ln>
@@ -38440,9 +38716,9 @@
           </a:bodyPr>
           <a:lstStyle/>
           <a:p>
-            <a:pPr algn="r"/>
+            <a:pPr algn="l"/>
             <a:r>
-              <a:rPr lang="en-IN">
+              <a:rPr lang="en-IN" sz="2000">
                 <a:solidFill>
                   <a:srgbClr val="FFFFFF"/>
                 </a:solidFill>
@@ -38469,23 +38745,114 @@
           </a:xfrm>
         </p:spPr>
         <p:txBody>
-          <a:bodyPr anchor="ctr">
+          <a:bodyPr anchor="t">
             <a:normAutofit/>
           </a:bodyPr>
           <a:lstStyle/>
           <a:p>
             <a:r>
-              <a:t>• Override ToString</a:t>
+              <a:rPr lang="en-US" sz="1800" b="1">
+                <a:solidFill>
+                  <a:srgbClr val="00B4D8"/>
+                </a:solidFill>
+              </a:rPr>
+              <a:t>Exercise 1: ToString Override</a:t>
             </a:r>
           </a:p>
           <a:p>
             <a:r>
-              <a:t>• Implement Equals &amp; GetHashCode</a:t>
+              <a:rPr lang="en-US" sz="1400">
+                <a:solidFill>
+                  <a:srgbClr val="FFFFFF"/>
+                </a:solidFill>
+              </a:rPr>
+              <a:t>Create a Person class with Name and Age properties</a:t>
             </a:r>
           </a:p>
           <a:p>
             <a:r>
-              <a:t>• Use is &amp; as operators</a:t>
+              <a:rPr lang="en-US" sz="1400">
+                <a:solidFill>
+                  <a:srgbClr val="FFFFFF"/>
+                </a:solidFill>
+              </a:rPr>
+              <a:t>Override ToString() to return a formatted string</a:t>
+            </a:r>
+          </a:p>
+          <a:p>
+            <a:endParaRPr lang="en-US" sz="800"/>
+          </a:p>
+          <a:p>
+            <a:r>
+              <a:rPr lang="en-US" sz="1800" b="1">
+                <a:solidFill>
+                  <a:srgbClr val="00B4D8"/>
+                </a:solidFill>
+              </a:rPr>
+              <a:t>Exercise 2: Equals and GetHashCode</a:t>
+            </a:r>
+          </a:p>
+          <a:p>
+            <a:r>
+              <a:rPr lang="en-US" sz="1400">
+                <a:solidFill>
+                  <a:srgbClr val="FFFFFF"/>
+                </a:solidFill>
+              </a:rPr>
+              <a:t>Override Equals() to compare by Name and Age</a:t>
+            </a:r>
+          </a:p>
+          <a:p>
+            <a:r>
+              <a:rPr lang="en-US" sz="1400">
+                <a:solidFill>
+                  <a:srgbClr val="FFFFFF"/>
+                </a:solidFill>
+              </a:rPr>
+              <a:t>Implement matching GetHashCode() using HashCode.Combine</a:t>
+            </a:r>
+          </a:p>
+          <a:p>
+            <a:r>
+              <a:rPr lang="en-US" sz="1400">
+                <a:solidFill>
+                  <a:srgbClr val="FFFFFF"/>
+                </a:solidFill>
+              </a:rPr>
+              <a:t>Test with Dictionary&lt;Person, string&gt;</a:t>
+            </a:r>
+          </a:p>
+          <a:p>
+            <a:endParaRPr lang="en-US" sz="800"/>
+          </a:p>
+          <a:p>
+            <a:r>
+              <a:rPr lang="en-US" sz="1800" b="1">
+                <a:solidFill>
+                  <a:srgbClr val="00B4D8"/>
+                </a:solidFill>
+              </a:rPr>
+              <a:t>Exercise 3: Type Checking</a:t>
+            </a:r>
+          </a:p>
+          <a:p>
+            <a:r>
+              <a:rPr lang="en-US" sz="1400">
+                <a:solidFill>
+                  <a:srgbClr val="FFFFFF"/>
+                </a:solidFill>
+              </a:rPr>
+              <a:t>Use is and as to check and cast object types</a:t>
+            </a:r>
+          </a:p>
+          <a:p>
+            <a:r>
+              <a:rPr lang="en-US" sz="1400">
+                <a:solidFill>
+                  <a:srgbClr val="FFFFFF"/>
+                </a:solidFill>
+              </a:rPr>
+              <a:t>Practice pattern matching with switch expressions</a:t>
             </a:r>
           </a:p>
         </p:txBody>
@@ -38504,7 +38871,7 @@
     <p:bg>
       <p:bgPr>
         <a:solidFill>
-          <a:schemeClr val="bg1"/>
+          <a:srgbClr val="0D1B2A"/>
         </a:solidFill>
         <a:effectLst/>
       </p:bgPr>
@@ -38555,7 +38922,7 @@
             <a:avLst/>
           </a:prstGeom>
           <a:solidFill>
-            <a:schemeClr val="accent1"/>
+            <a:srgbClr val="00B4D8"/>
           </a:solidFill>
           <a:ln>
             <a:noFill/>
@@ -38609,7 +38976,7 @@
           <a:lstStyle/>
           <a:p>
             <a:r>
-              <a:rPr lang="en-IN">
+              <a:rPr lang="en-IN" sz="2000">
                 <a:solidFill>
                   <a:srgbClr val="FFFFFF"/>
                 </a:solidFill>
@@ -38664,7 +39031,7 @@
     <p:bg>
       <p:bgPr>
         <a:solidFill>
-          <a:schemeClr val="bg1"/>
+          <a:srgbClr val="0D1B2A"/>
         </a:solidFill>
         <a:effectLst/>
       </p:bgPr>
@@ -38715,7 +39082,7 @@
             <a:avLst/>
           </a:prstGeom>
           <a:solidFill>
-            <a:schemeClr val="accent1"/>
+            <a:srgbClr val="00B4D8"/>
           </a:solidFill>
           <a:ln>
             <a:noFill/>
@@ -38769,7 +39136,7 @@
           <a:lstStyle/>
           <a:p>
             <a:r>
-              <a:rPr lang="en-IN" sz="3700">
+              <a:rPr lang="en-IN" sz="2000">
                 <a:solidFill>
                   <a:srgbClr val="FFFFFF"/>
                 </a:solidFill>
@@ -38824,7 +39191,7 @@
     <p:bg>
       <p:bgPr>
         <a:solidFill>
-          <a:schemeClr val="bg1"/>
+          <a:srgbClr val="0D1B2A"/>
         </a:solidFill>
         <a:effectLst/>
       </p:bgPr>
@@ -38875,7 +39242,7 @@
             <a:avLst/>
           </a:prstGeom>
           <a:solidFill>
-            <a:schemeClr val="accent1"/>
+            <a:srgbClr val="00B4D8"/>
           </a:solidFill>
           <a:ln>
             <a:noFill/>
@@ -38929,7 +39296,7 @@
           <a:lstStyle/>
           <a:p>
             <a:r>
-              <a:rPr lang="en-IN">
+              <a:rPr lang="en-IN" sz="2000">
                 <a:solidFill>
                   <a:srgbClr val="FFFFFF"/>
                 </a:solidFill>
@@ -38984,7 +39351,7 @@
     <p:bg>
       <p:bgPr>
         <a:solidFill>
-          <a:schemeClr val="bg1"/>
+          <a:srgbClr val="0D1B2A"/>
         </a:solidFill>
         <a:effectLst/>
       </p:bgPr>
@@ -39035,7 +39402,7 @@
             <a:avLst/>
           </a:prstGeom>
           <a:solidFill>
-            <a:schemeClr val="accent1"/>
+            <a:srgbClr val="00B4D8"/>
           </a:solidFill>
           <a:ln>
             <a:noFill/>
@@ -39089,7 +39456,7 @@
           <a:lstStyle/>
           <a:p>
             <a:r>
-              <a:rPr lang="en-IN" sz="3700">
+              <a:rPr lang="en-IN" sz="2000">
                 <a:solidFill>
                   <a:srgbClr val="FFFFFF"/>
                 </a:solidFill>
@@ -39144,7 +39511,7 @@
     <p:bg>
       <p:bgPr>
         <a:solidFill>
-          <a:schemeClr val="bg1"/>
+          <a:srgbClr val="0D1B2A"/>
         </a:solidFill>
         <a:effectLst/>
       </p:bgPr>
@@ -39163,7 +39530,7 @@
           <a:chExt cx="0" cy="0"/>
         </a:xfrm>
       </p:grpSpPr>
-      <p:sp useBgFill="1">
+      <p:sp>
         <p:nvSpPr>
           <p:cNvPr id="8" name="Rectangle 7">
             <a:extLst>
@@ -39194,6 +39561,9 @@
           <a:prstGeom prst="rect">
             <a:avLst/>
           </a:prstGeom>
+          <a:solidFill>
+            <a:srgbClr val="0D1B2A"/>
+          </a:solidFill>
           <a:ln>
             <a:noFill/>
           </a:ln>
@@ -39254,6 +39624,9 @@
           <a:prstGeom prst="rect">
             <a:avLst/>
           </a:prstGeom>
+          <a:solidFill>
+            <a:srgbClr val="00B4D8"/>
+          </a:solidFill>
           <a:ln>
             <a:noFill/>
           </a:ln>
@@ -39305,9 +39678,9 @@
           </a:bodyPr>
           <a:lstStyle/>
           <a:p>
-            <a:pPr algn="r"/>
+            <a:pPr algn="l"/>
             <a:r>
-              <a:rPr lang="en-IN">
+              <a:rPr lang="en-IN" sz="2000">
                 <a:solidFill>
                   <a:srgbClr val="FFFFFF"/>
                 </a:solidFill>
@@ -39334,41 +39707,131 @@
           </a:xfrm>
         </p:spPr>
         <p:txBody>
-          <a:bodyPr anchor="ctr">
+          <a:bodyPr anchor="t">
             <a:normAutofit/>
           </a:bodyPr>
           <a:lstStyle/>
           <a:p>
             <a:r>
-              <a:t>Abstract Class:</a:t>
+              <a:rPr lang="en-US" sz="1800" b="1">
+                <a:solidFill>
+                  <a:srgbClr val="00B4D8"/>
+                </a:solidFill>
+              </a:rPr>
+              <a:t>Abstract Class</a:t>
             </a:r>
           </a:p>
           <a:p>
             <a:r>
-              <a:t>- Can have fields, constructors</a:t>
+              <a:rPr lang="en-US" sz="1400">
+                <a:solidFill>
+                  <a:srgbClr val="FFFFFF"/>
+                </a:solidFill>
+              </a:rPr>
+              <a:t>Can have fields, constructors, properties</a:t>
             </a:r>
           </a:p>
           <a:p>
             <a:r>
-              <a:t>- Supports partial implementation</a:t>
-            </a:r>
-          </a:p>
-          <a:p>
-            <a:endParaRPr/>
-          </a:p>
-          <a:p>
-            <a:r>
-              <a:t>Interface:</a:t>
+              <a:rPr lang="en-US" sz="1400">
+                <a:solidFill>
+                  <a:srgbClr val="FFFFFF"/>
+                </a:solidFill>
+              </a:rPr>
+              <a:t>Supports partial implementation</a:t>
             </a:r>
           </a:p>
           <a:p>
             <a:r>
-              <a:t>- No fields</a:t>
+              <a:rPr lang="en-US" sz="1400">
+                <a:solidFill>
+                  <a:srgbClr val="FFFFFF"/>
+                </a:solidFill>
+              </a:rPr>
+              <a:t>Single inheritance only</a:t>
             </a:r>
           </a:p>
           <a:p>
             <a:r>
-              <a:t>- Supports multiple inheritance</a:t>
+              <a:rPr lang="en-US" sz="1400">
+                <a:solidFill>
+                  <a:srgbClr val="FFFFFF"/>
+                </a:solidFill>
+              </a:rPr>
+              <a:t>Can have access modifiers on members</a:t>
+            </a:r>
+          </a:p>
+          <a:p>
+            <a:r>
+              <a:rPr lang="en-US" sz="1400">
+                <a:solidFill>
+                  <a:srgbClr val="FFFFFF"/>
+                </a:solidFill>
+              </a:rPr>
+              <a:t>Best for: shared base functionality</a:t>
+            </a:r>
+          </a:p>
+          <a:p>
+            <a:endParaRPr lang="en-US" sz="800"/>
+          </a:p>
+          <a:p>
+            <a:r>
+              <a:rPr lang="en-US" sz="1800" b="1">
+                <a:solidFill>
+                  <a:srgbClr val="00B4D8"/>
+                </a:solidFill>
+              </a:rPr>
+              <a:t>Interface</a:t>
+            </a:r>
+          </a:p>
+          <a:p>
+            <a:r>
+              <a:rPr lang="en-US" sz="1400">
+                <a:solidFill>
+                  <a:srgbClr val="FFFFFF"/>
+                </a:solidFill>
+              </a:rPr>
+              <a:t>No fields or constructors allowed</a:t>
+            </a:r>
+          </a:p>
+          <a:p>
+            <a:r>
+              <a:rPr lang="en-US" sz="1400">
+                <a:solidFill>
+                  <a:srgbClr val="FFFFFF"/>
+                </a:solidFill>
+              </a:rPr>
+              <a:t>Supports multiple inheritance</a:t>
+            </a:r>
+          </a:p>
+          <a:p>
+            <a:r>
+              <a:rPr lang="en-US" sz="1400">
+                <a:solidFill>
+                  <a:srgbClr val="FFFFFF"/>
+                </a:solidFill>
+              </a:rPr>
+              <a:t>All members are public by default</a:t>
+            </a:r>
+          </a:p>
+          <a:p>
+            <a:r>
+              <a:rPr lang="en-US" sz="1400">
+                <a:solidFill>
+                  <a:srgbClr val="FFFFFF"/>
+                </a:solidFill>
+              </a:rPr>
+              <a:t>Default implementations since C# 8.0</a:t>
+            </a:r>
+          </a:p>
+          <a:p>
+            <a:r>
+              <a:rPr lang="en-US" sz="1400">
+                <a:solidFill>
+                  <a:srgbClr val="FFFFFF"/>
+                </a:solidFill>
+              </a:rPr>
+              <a:t>Best for: defining contracts and capabilities</a:t>
             </a:r>
           </a:p>
         </p:txBody>
@@ -39387,7 +39850,7 @@
     <p:bg>
       <p:bgPr>
         <a:solidFill>
-          <a:schemeClr val="bg1"/>
+          <a:srgbClr val="0D1B2A"/>
         </a:solidFill>
         <a:effectLst/>
       </p:bgPr>
@@ -39406,7 +39869,7 @@
           <a:chExt cx="0" cy="0"/>
         </a:xfrm>
       </p:grpSpPr>
-      <p:sp useBgFill="1">
+      <p:sp>
         <p:nvSpPr>
           <p:cNvPr id="8" name="Rectangle 7">
             <a:extLst>
@@ -39437,6 +39900,9 @@
           <a:prstGeom prst="rect">
             <a:avLst/>
           </a:prstGeom>
+          <a:solidFill>
+            <a:srgbClr val="0D1B2A"/>
+          </a:solidFill>
           <a:ln>
             <a:noFill/>
           </a:ln>
@@ -39497,6 +39963,9 @@
           <a:prstGeom prst="rect">
             <a:avLst/>
           </a:prstGeom>
+          <a:solidFill>
+            <a:srgbClr val="00B4D8"/>
+          </a:solidFill>
           <a:ln>
             <a:noFill/>
           </a:ln>
@@ -39548,9 +40017,9 @@
           </a:bodyPr>
           <a:lstStyle/>
           <a:p>
-            <a:pPr algn="r"/>
+            <a:pPr algn="l"/>
             <a:r>
-              <a:rPr lang="en-IN">
+              <a:rPr lang="en-IN" sz="2000">
                 <a:solidFill>
                   <a:srgbClr val="FFFFFF"/>
                 </a:solidFill>
@@ -39577,28 +40046,114 @@
           </a:xfrm>
         </p:spPr>
         <p:txBody>
-          <a:bodyPr anchor="ctr">
+          <a:bodyPr anchor="t">
             <a:normAutofit/>
           </a:bodyPr>
           <a:lstStyle/>
           <a:p>
             <a:r>
-              <a:t>• Create abstract class Shape</a:t>
+              <a:rPr lang="en-US" sz="1800" b="1">
+                <a:solidFill>
+                  <a:srgbClr val="00B4D8"/>
+                </a:solidFill>
+              </a:rPr>
+              <a:t>Exercise 1: Abstract Shape Class</a:t>
             </a:r>
           </a:p>
           <a:p>
             <a:r>
-              <a:t>• Implement Circle &amp; Rectangle</a:t>
+              <a:rPr lang="en-US" sz="1400">
+                <a:solidFill>
+                  <a:srgbClr val="FFFFFF"/>
+                </a:solidFill>
+              </a:rPr>
+              <a:t>Create abstract class Shape with Area() and Perimeter()</a:t>
             </a:r>
           </a:p>
           <a:p>
             <a:r>
-              <a:t>• Create interface IDrawable</a:t>
+              <a:rPr lang="en-US" sz="1400">
+                <a:solidFill>
+                  <a:srgbClr val="FFFFFF"/>
+                </a:solidFill>
+              </a:rPr>
+              <a:t>Implement Circle and Rectangle subclasses</a:t>
             </a:r>
           </a:p>
           <a:p>
             <a:r>
-              <a:t>• Implement in classes</a:t>
+              <a:rPr lang="en-US" sz="1400">
+                <a:solidFill>
+                  <a:srgbClr val="FFFFFF"/>
+                </a:solidFill>
+              </a:rPr>
+              <a:t>Add a Display() method with shared logic</a:t>
+            </a:r>
+          </a:p>
+          <a:p>
+            <a:endParaRPr lang="en-US" sz="800"/>
+          </a:p>
+          <a:p>
+            <a:r>
+              <a:rPr lang="en-US" sz="1800" b="1">
+                <a:solidFill>
+                  <a:srgbClr val="00B4D8"/>
+                </a:solidFill>
+              </a:rPr>
+              <a:t>Exercise 2: IDrawable Interface</a:t>
+            </a:r>
+          </a:p>
+          <a:p>
+            <a:r>
+              <a:rPr lang="en-US" sz="1400">
+                <a:solidFill>
+                  <a:srgbClr val="FFFFFF"/>
+                </a:solidFill>
+              </a:rPr>
+              <a:t>Define IDrawable with Draw() and Resize() methods</a:t>
+            </a:r>
+          </a:p>
+          <a:p>
+            <a:r>
+              <a:rPr lang="en-US" sz="1400">
+                <a:solidFill>
+                  <a:srgbClr val="FFFFFF"/>
+                </a:solidFill>
+              </a:rPr>
+              <a:t>Implement in Circle and Rectangle classes</a:t>
+            </a:r>
+          </a:p>
+          <a:p>
+            <a:r>
+              <a:rPr lang="en-US" sz="1400">
+                <a:solidFill>
+                  <a:srgbClr val="FFFFFF"/>
+                </a:solidFill>
+              </a:rPr>
+              <a:t>Test polymorphic behavior with a List&lt;IDrawable&gt;</a:t>
+            </a:r>
+          </a:p>
+          <a:p>
+            <a:endParaRPr lang="en-US" sz="800"/>
+          </a:p>
+          <a:p>
+            <a:r>
+              <a:rPr lang="en-US" sz="1800" b="1">
+                <a:solidFill>
+                  <a:srgbClr val="00B4D8"/>
+                </a:solidFill>
+              </a:rPr>
+              <a:t>Challenge</a:t>
+            </a:r>
+          </a:p>
+          <a:p>
+            <a:r>
+              <a:rPr lang="en-US" sz="1400">
+                <a:solidFill>
+                  <a:srgbClr val="FFFFFF"/>
+                </a:solidFill>
+              </a:rPr>
+              <a:t>Add a Triangle class that inherits Shape and implements IDrawable</a:t>
             </a:r>
           </a:p>
         </p:txBody>
@@ -39617,7 +40172,7 @@
     <p:bg>
       <p:bgPr>
         <a:solidFill>
-          <a:schemeClr val="bg1"/>
+          <a:srgbClr val="0D1B2A"/>
         </a:solidFill>
         <a:effectLst/>
       </p:bgPr>
@@ -39636,7 +40191,7 @@
           <a:chExt cx="0" cy="0"/>
         </a:xfrm>
       </p:grpSpPr>
-      <p:sp useBgFill="1">
+      <p:sp>
         <p:nvSpPr>
           <p:cNvPr id="8" name="Rectangle 7">
             <a:extLst>
@@ -39667,6 +40222,9 @@
           <a:prstGeom prst="rect">
             <a:avLst/>
           </a:prstGeom>
+          <a:solidFill>
+            <a:srgbClr val="0D1B2A"/>
+          </a:solidFill>
           <a:ln>
             <a:noFill/>
           </a:ln>
@@ -39727,6 +40285,9 @@
           <a:prstGeom prst="rect">
             <a:avLst/>
           </a:prstGeom>
+          <a:solidFill>
+            <a:srgbClr val="00B4D8"/>
+          </a:solidFill>
           <a:ln>
             <a:noFill/>
           </a:ln>
@@ -39778,9 +40339,9 @@
           </a:bodyPr>
           <a:lstStyle/>
           <a:p>
-            <a:pPr algn="r"/>
+            <a:pPr algn="l"/>
             <a:r>
-              <a:rPr lang="en-IN">
+              <a:rPr lang="en-IN" sz="2000">
                 <a:solidFill>
                   <a:srgbClr val="FFFFFF"/>
                 </a:solidFill>
@@ -39807,38 +40368,111 @@
           </a:xfrm>
         </p:spPr>
         <p:txBody>
-          <a:bodyPr anchor="ctr">
+          <a:bodyPr anchor="t">
             <a:normAutofit/>
           </a:bodyPr>
           <a:lstStyle/>
           <a:p>
             <a:r>
-              <a:t>• Object class methods</a:t>
+              <a:rPr lang="en-US" sz="1800" b="1">
+                <a:solidFill>
+                  <a:srgbClr val="00B4D8"/>
+                </a:solidFill>
+              </a:rPr>
+              <a:t>Topics Covered</a:t>
             </a:r>
           </a:p>
           <a:p>
             <a:r>
-              <a:t>• Equals</a:t>
+              <a:rPr lang="en-US" sz="1400">
+                <a:solidFill>
+                  <a:srgbClr val="FFFFFF"/>
+                </a:solidFill>
+              </a:rPr>
+              <a:t>The System.Object base class and its role</a:t>
             </a:r>
           </a:p>
           <a:p>
             <a:r>
-              <a:t>• GetHashCode</a:t>
+              <a:rPr lang="en-US" sz="1400">
+                <a:solidFill>
+                  <a:srgbClr val="FFFFFF"/>
+                </a:solidFill>
+              </a:rPr>
+              <a:t>Overriding Equals() for value-based comparison</a:t>
             </a:r>
           </a:p>
           <a:p>
             <a:r>
-              <a:t>• GetType</a:t>
+              <a:rPr lang="en-US" sz="1400">
+                <a:solidFill>
+                  <a:srgbClr val="FFFFFF"/>
+                </a:solidFill>
+              </a:rPr>
+              <a:t>Implementing GetHashCode() correctly</a:t>
             </a:r>
           </a:p>
           <a:p>
             <a:r>
-              <a:t>• ToString</a:t>
+              <a:rPr lang="en-US" sz="1400">
+                <a:solidFill>
+                  <a:srgbClr val="FFFFFF"/>
+                </a:solidFill>
+              </a:rPr>
+              <a:t>Customizing ToString() for debugging</a:t>
             </a:r>
           </a:p>
           <a:p>
             <a:r>
-              <a:t>• is &amp; as operators</a:t>
+              <a:rPr lang="en-US" sz="1400">
+                <a:solidFill>
+                  <a:srgbClr val="FFFFFF"/>
+                </a:solidFill>
+              </a:rPr>
+              <a:t>Using GetType() for runtime type info</a:t>
+            </a:r>
+          </a:p>
+          <a:p>
+            <a:r>
+              <a:rPr lang="en-US" sz="1400">
+                <a:solidFill>
+                  <a:srgbClr val="FFFFFF"/>
+                </a:solidFill>
+              </a:rPr>
+              <a:t>Type checking with is and safe casting with as</a:t>
+            </a:r>
+          </a:p>
+          <a:p>
+            <a:endParaRPr lang="en-US" sz="800"/>
+          </a:p>
+          <a:p>
+            <a:r>
+              <a:rPr lang="en-US" sz="1800" b="1">
+                <a:solidFill>
+                  <a:srgbClr val="00B4D8"/>
+                </a:solidFill>
+              </a:rPr>
+              <a:t>Why It Matters</a:t>
+            </a:r>
+          </a:p>
+          <a:p>
+            <a:r>
+              <a:rPr lang="en-US" sz="1400">
+                <a:solidFill>
+                  <a:srgbClr val="FFFFFF"/>
+                </a:solidFill>
+              </a:rPr>
+              <a:t>Essential for collections, LINQ, and debugging</a:t>
+            </a:r>
+          </a:p>
+          <a:p>
+            <a:r>
+              <a:rPr lang="en-US" sz="1400">
+                <a:solidFill>
+                  <a:srgbClr val="FFFFFF"/>
+                </a:solidFill>
+              </a:rPr>
+              <a:t>Required for proper Dictionary and HashSet usage</a:t>
             </a:r>
           </a:p>
         </p:txBody>
@@ -39857,7 +40491,7 @@
     <p:bg>
       <p:bgPr>
         <a:solidFill>
-          <a:schemeClr val="bg1"/>
+          <a:srgbClr val="0D1B2A"/>
         </a:solidFill>
         <a:effectLst/>
       </p:bgPr>
@@ -39876,7 +40510,7 @@
           <a:chExt cx="0" cy="0"/>
         </a:xfrm>
       </p:grpSpPr>
-      <p:sp useBgFill="1">
+      <p:sp>
         <p:nvSpPr>
           <p:cNvPr id="8" name="Rectangle 7">
             <a:extLst>
@@ -39907,6 +40541,9 @@
           <a:prstGeom prst="rect">
             <a:avLst/>
           </a:prstGeom>
+          <a:solidFill>
+            <a:srgbClr val="0D1B2A"/>
+          </a:solidFill>
           <a:ln>
             <a:noFill/>
           </a:ln>
@@ -39967,6 +40604,9 @@
           <a:prstGeom prst="rect">
             <a:avLst/>
           </a:prstGeom>
+          <a:solidFill>
+            <a:srgbClr val="00B4D8"/>
+          </a:solidFill>
           <a:ln>
             <a:noFill/>
           </a:ln>
@@ -40018,9 +40658,9 @@
           </a:bodyPr>
           <a:lstStyle/>
           <a:p>
-            <a:pPr algn="r"/>
+            <a:pPr algn="l"/>
             <a:r>
-              <a:rPr lang="en-IN">
+              <a:rPr lang="en-IN" sz="2000">
                 <a:solidFill>
                   <a:srgbClr val="FFFFFF"/>
                 </a:solidFill>
@@ -40047,38 +40687,136 @@
           </a:xfrm>
         </p:spPr>
         <p:txBody>
-          <a:bodyPr anchor="ctr">
+          <a:bodyPr anchor="t">
             <a:normAutofit/>
           </a:bodyPr>
           <a:lstStyle/>
           <a:p>
             <a:r>
-              <a:t>Base class for all types</a:t>
+              <a:rPr lang="en-US" sz="1800" b="1">
+                <a:solidFill>
+                  <a:srgbClr val="00B4D8"/>
+                </a:solidFill>
+              </a:rPr>
+              <a:t>System.Object: The Root of All Types</a:t>
             </a:r>
           </a:p>
           <a:p>
             <a:r>
-              <a:t>Common methods:</a:t>
+              <a:rPr lang="en-US" sz="1400">
+                <a:solidFill>
+                  <a:srgbClr val="FFFFFF"/>
+                </a:solidFill>
+              </a:rPr>
+              <a:t>Every class in C# implicitly inherits from Object</a:t>
             </a:r>
           </a:p>
           <a:p>
             <a:r>
-              <a:t>• Equals()</a:t>
+              <a:rPr lang="en-US" sz="1400">
+                <a:solidFill>
+                  <a:srgbClr val="FFFFFF"/>
+                </a:solidFill>
+              </a:rPr>
+              <a:t>Provides default behavior for all types</a:t>
+            </a:r>
+          </a:p>
+          <a:p>
+            <a:endParaRPr lang="en-US" sz="800"/>
+          </a:p>
+          <a:p>
+            <a:r>
+              <a:rPr lang="en-US" sz="1800" b="1">
+                <a:solidFill>
+                  <a:srgbClr val="00B4D8"/>
+                </a:solidFill>
+              </a:rPr>
+              <a:t>Key Methods</a:t>
             </a:r>
           </a:p>
           <a:p>
             <a:r>
-              <a:t>• GetHashCode()</a:t>
+              <a:rPr lang="en-US" sz="1400" b="1">
+                <a:solidFill>
+                  <a:srgbClr val="FFFFFF"/>
+                </a:solidFill>
+              </a:rPr>
+              <a:t>Equals()</a:t>
+            </a:r>
+            <a:r>
+              <a:rPr lang="en-US" sz="1400">
+                <a:solidFill>
+                  <a:srgbClr val="B0B0B0"/>
+                </a:solidFill>
+              </a:rPr>
+              <a:t> — Compares object equality</a:t>
             </a:r>
           </a:p>
           <a:p>
             <a:r>
-              <a:t>• ToString()</a:t>
+              <a:rPr lang="en-US" sz="1400" b="1">
+                <a:solidFill>
+                  <a:srgbClr val="FFFFFF"/>
+                </a:solidFill>
+              </a:rPr>
+              <a:t>GetHashCode()</a:t>
+            </a:r>
+            <a:r>
+              <a:rPr lang="en-US" sz="1400">
+                <a:solidFill>
+                  <a:srgbClr val="B0B0B0"/>
+                </a:solidFill>
+              </a:rPr>
+              <a:t> — Returns hash for collections</a:t>
             </a:r>
           </a:p>
           <a:p>
             <a:r>
-              <a:t>• GetType()</a:t>
+              <a:rPr lang="en-US" sz="1400" b="1">
+                <a:solidFill>
+                  <a:srgbClr val="FFFFFF"/>
+                </a:solidFill>
+              </a:rPr>
+              <a:t>ToString()</a:t>
+            </a:r>
+            <a:r>
+              <a:rPr lang="en-US" sz="1400">
+                <a:solidFill>
+                  <a:srgbClr val="B0B0B0"/>
+                </a:solidFill>
+              </a:rPr>
+              <a:t> — String representation of object</a:t>
+            </a:r>
+          </a:p>
+          <a:p>
+            <a:r>
+              <a:rPr lang="en-US" sz="1400" b="1">
+                <a:solidFill>
+                  <a:srgbClr val="FFFFFF"/>
+                </a:solidFill>
+              </a:rPr>
+              <a:t>GetType()</a:t>
+            </a:r>
+            <a:r>
+              <a:rPr lang="en-US" sz="1400">
+                <a:solidFill>
+                  <a:srgbClr val="B0B0B0"/>
+                </a:solidFill>
+              </a:rPr>
+              <a:t> — Runtime type information</a:t>
+            </a:r>
+          </a:p>
+          <a:p>
+            <a:endParaRPr lang="en-US" sz="800"/>
+          </a:p>
+          <a:p>
+            <a:r>
+              <a:rPr lang="en-US" sz="1400" i="1">
+                <a:solidFill>
+                  <a:srgbClr val="00B4D8"/>
+                </a:solidFill>
+              </a:rPr>
+              <a:t>Override these methods to customize type behavior</a:t>
             </a:r>
           </a:p>
         </p:txBody>
